--- a/artifacts/speaking-portfolio-expanded/decks/judgment-40min-handout.pptx
+++ b/artifacts/speaking-portfolio-expanded/decks/judgment-40min-handout.pptx
@@ -268,7 +268,7 @@
                 <a:ea typeface="Arial"/>
                 <a:cs typeface="Arial"/>
               </a:rPr>
-              <a:t xml:space="preserve">&gt; canEdit(user) = user.roles.includes("admin")</a:t>
+              <a:t xml:space="preserve">&gt; canEdit(user, resourceTenant) = user.roles.includes("admin")</a:t>
             </a:r>
             <a:endParaRPr lang="en-US" sz="1200"/>
           </a:p>
@@ -406,6 +406,52 @@
                 <a:ea typeface="Arial"/>
                 <a:cs typeface="Arial"/>
               </a:rPr>
+              <a:t xml:space="preserve">The resource tenant is right there in the signature. Nothing reads it. And you already heard the cross-tenant case, back on the spec slide. Watch the vote anyway.</a:t>
+            </a:r>
+            <a:endParaRPr lang="en-US" sz="1200"/>
+          </a:p>
+          <a:p>
+            <a:pPr marL="0" indent="0">
+              <a:lnSpc>
+                <a:spcPts val="1560"/>
+              </a:lnSpc>
+              <a:spcAft>
+                <a:spcPts val="0"/>
+              </a:spcAft>
+              <a:buNone/>
+            </a:pPr>
+            <a:r>
+              <a:rPr lang="en-US" sz="1200" b="0">
+                <a:solidFill>
+                  <a:srgbClr val="202b33"/>
+                </a:solidFill>
+                <a:latin typeface="Arial"/>
+                <a:ea typeface="Arial"/>
+                <a:cs typeface="Arial"/>
+              </a:rPr>
+              <a:t xml:space="preserve"/>
+            </a:r>
+            <a:endParaRPr lang="en-US" sz="1200"/>
+          </a:p>
+          <a:p>
+            <a:pPr marL="0" indent="0">
+              <a:lnSpc>
+                <a:spcPts val="1560"/>
+              </a:lnSpc>
+              <a:spcAft>
+                <a:spcPts val="0"/>
+              </a:spcAft>
+              <a:buNone/>
+            </a:pPr>
+            <a:r>
+              <a:rPr lang="en-US" sz="1200" b="0">
+                <a:solidFill>
+                  <a:srgbClr val="202b33"/>
+                </a:solidFill>
+                <a:latin typeface="Arial"/>
+                <a:ea typeface="Arial"/>
+                <a:cs typeface="Arial"/>
+              </a:rPr>
               <a:t xml:space="preserve">Would you approve it? Now run the case where that administrator belongs to tenant A and the resource belongs to tenant B. The test was accurate about the behavior it checked. The behavior was incomplete in exactly the same way as the implementation.</a:t>
             </a:r>
             <a:endParaRPr lang="en-US" sz="1200"/>
@@ -498,7 +544,7 @@
                 <a:ea typeface="Arial"/>
                 <a:cs typeface="Arial"/>
               </a:rPr>
-              <a:t xml:space="preserve">Bainbridge asks what automation leaves the operator doing. Automation-bias experiments ask what happens when people defer to a decision aid despite other evidence. Those experiments were not code-review trials. This fixture is how the concern shows up in our queue: the green signal gets attention that the missing case did not.</a:t>
+              <a:t xml:space="preserve">Bainbridge asks what automation leaves the operator doing. Skitka and colleagues put people in a flight simulator with an automated monitoring aid and counted the trials where the aid was wrong. On those trials people missed events the aid did not flag, and acted on prompts the other instruments contradicted. That is the whole finding, and it is about the trials where the aid was wrong. This fixture is how the same concern shows up in our queue: the green signal gets attention that the missing case did not.</a:t>
             </a:r>
             <a:endParaRPr lang="en-US" sz="1200"/>
           </a:p>
@@ -590,7 +636,7 @@
                 <a:ea typeface="Arial"/>
                 <a:cs typeface="Arial"/>
               </a:rPr>
-              <a:t xml:space="preserve">Source: Bainbridge (1983), [Ironies of automation](https://www.sciencedirect.com/science/article/pii/0005109883900468). Mosier and Skitka (1999), [Automation Use and Automation Bias](https://journals.sagepub.com/doi/10.1177/154193129904300346).</a:t>
+              <a:t xml:space="preserve">Source: Lisanne Bainbridge (1983), [Ironies of automation](https://www.sciencedirect.com/science/article/pii/0005109883900468), Automatica 19(6), 775–779. Linda J. Skitka, Kathleen L. Mosier and Mark Burdick (1999), [Does automation bias decision-making?](https://doi.org/10.1006/ijhc.1999.0252), International Journal of Human-Computer Studies 51(5), 991–1006. A flight-simulation task with a monitoring aid, not a code-review trial.</a:t>
             </a:r>
             <a:endParaRPr lang="en-US" sz="1200"/>
           </a:p>
@@ -864,7 +910,7 @@
                 <a:ea typeface="Arial"/>
                 <a:cs typeface="Arial"/>
               </a:rPr>
-              <a:t xml:space="preserve">Elish calls the human who absorbs blame without enough control a moral crumple zone. Put an engineer at the end of an automated pipeline, give them two minutes to approve a diff, and announce that responsibility stayed human. The org chart looks excellent.</a:t>
+              <a:t xml:space="preserve">Elish calls the human who absorbs blame without enough control a moral crumple zone. Put an engineer at the end of an automated pipeline, give them two minutes to approve a diff, and announce that responsibility stayed human. The org chart looks excellent. We did not remove the bottleneck. We moved it onto one person and gave them a keyboard shortcut for approving things.</a:t>
             </a:r>
             <a:endParaRPr lang="en-US" sz="1200"/>
           </a:p>
@@ -1276,7 +1322,7 @@
                 <a:ea typeface="Arial"/>
                 <a:cs typeface="Arial"/>
               </a:rPr>
-              <a:t xml:space="preserve">Brooks distinguished the essential conceptual work of software from the accidental difficulty of expressing it in a machine. Use that distinction here without turning his old forecast into a timeless speed limit.</a:t>
+              <a:t xml:space="preserve">Brooks distinguished the essential conceptual work of software from the accidental difficulty of expressing it in a machine. His forecast expired in 1996. The distinction did not.</a:t>
             </a:r>
             <a:endParaRPr lang="en-US" sz="1200"/>
           </a:p>
@@ -1711,7 +1757,7 @@
                 <a:ea typeface="Arial"/>
                 <a:cs typeface="Arial"/>
               </a:rPr>
-              <a:t xml:space="preserve">Fewer arrivals means deciding which changes should exist. It includes declining a second implementation after the first already met the need. Comparing fleets of candidate agents belongs to Dynamic Scaling. Here we are protecting the person who accepts the resulting work.</a:t>
+              <a:t xml:space="preserve">Fewer arrivals means deciding which changes should exist, including declining a second implementation after the first already met the need. That is a rule about review load, not about generation: generate ten parallel attempts if you like, as long as a gate collapses them to one candidate before a human reads any of them. Judging the ten is Dynamic Scaling's talk, and its Council of Guards eats nine. This one protects the person who accepts the one that got through.</a:t>
             </a:r>
             <a:endParaRPr lang="en-US" sz="1200"/>
           </a:p>
@@ -2443,7 +2489,7 @@
                 <a:ea typeface="Arial"/>
                 <a:cs typeface="Arial"/>
               </a:rPr>
-              <a:t xml:space="preserve">![Knowing when to stop](../../reveal-talks/assets/judgment/queue.svg)</a:t>
+              <a:t xml:space="preserve">![Kingman: queue wait vs reviewer utilization, variability factor one](../../reveal-talks/assets/judgment/queue.svg)</a:t>
             </a:r>
             <a:endParaRPr lang="en-US" sz="1200"/>
           </a:p>
@@ -2604,7 +2650,7 @@
                 <a:ea typeface="Arial"/>
                 <a:cs typeface="Arial"/>
               </a:rPr>
-              <a:t xml:space="preserve">Ninety-five percent gives a nineteen-times wait in our model. We can argue about the model by measuring arrivals, service time, and variability. We cannot argue the queue away by pointing at how quickly the code appeared.</a:t>
+              <a:t xml:space="preserve">Ninety-five percent utilization is not efficiency. It is a nineteen-times wait with good posture. Argue with the model by measuring arrivals, service time, and variability. You cannot argue the queue away by pointing at how quickly the code appeared.</a:t>
             </a:r>
             <a:endParaRPr lang="en-US" sz="1200"/>
           </a:p>
@@ -2878,7 +2924,7 @@
                 <a:ea typeface="Arial"/>
                 <a:cs typeface="Arial"/>
               </a:rPr>
-              <a:t xml:space="preserve">W. Edwards Deming’s Point 3, discussed by the [Deming Institute on software code reviews](https://deming.org/software-code-reviews-from-a-deming-perspective/).</a:t>
+              <a:t xml:space="preserve">W. Edwards Deming (1986), Out of the Crisis, MIT Center for Advanced Engineering Study; Point 3 of the Fourteen Points. Applied to review by the [Deming Institute](https://deming.org/software-code-reviews-from-a-deming-perspective/).</a:t>
             </a:r>
             <a:endParaRPr lang="en-US" sz="1200"/>
           </a:p>
@@ -2970,7 +3016,7 @@
                 <a:ea typeface="Arial"/>
                 <a:cs typeface="Arial"/>
               </a:rPr>
-              <a:t xml:space="preserve">Bainbridge (1983), [Ironies of automation](https://www.sciencedirect.com/science/article/pii/0005109883900468). Mosier and Skitka (1999), [Automation Use and Automation Bias](https://journals.sagepub.com/doi/10.1177/154193129904300346).</a:t>
+              <a:t xml:space="preserve">Lisanne Bainbridge (1983), [Ironies of automation](https://www.sciencedirect.com/science/article/pii/0005109883900468), Automatica 19(6), 775–779. Linda J. Skitka, Kathleen L. Mosier and Mark Burdick (1999), [Does automation bias decision-making?](https://doi.org/10.1006/ijhc.1999.0252), International Journal of Human-Computer Studies 51(5), 991–1006. A flight-simulation task with a monitoring aid, not a code-review trial.</a:t>
             </a:r>
             <a:endParaRPr lang="en-US" sz="1200"/>
           </a:p>
@@ -3221,7 +3267,7 @@
                 <a:ea typeface="Arial"/>
                 <a:cs typeface="Arial"/>
               </a:rPr>
-              <a:t xml:space="preserve">W. Edwards Deming’s Point 3, discussed by the [Deming Institute on software code reviews](https://deming.org/software-code-reviews-from-a-deming-perspective/).</a:t>
+              <a:t xml:space="preserve">W. Edwards Deming (1986), Out of the Crisis, MIT Center for Advanced Engineering Study; Point 3 of the Fourteen Points. Applied to review by the [Deming Institute](https://deming.org/software-code-reviews-from-a-deming-perspective/).</a:t>
             </a:r>
             <a:endParaRPr lang="en-US" sz="1200"/>
           </a:p>
@@ -3313,7 +3359,7 @@
                 <a:ea typeface="Arial"/>
                 <a:cs typeface="Arial"/>
               </a:rPr>
-              <a:t xml:space="preserve">Bainbridge (1983), [Ironies of automation](https://www.sciencedirect.com/science/article/pii/0005109883900468). Mosier and Skitka (1999), [Automation Use and Automation Bias](https://journals.sagepub.com/doi/10.1177/154193129904300346).</a:t>
+              <a:t xml:space="preserve">Lisanne Bainbridge (1983), [Ironies of automation](https://www.sciencedirect.com/science/article/pii/0005109883900468), Automatica 19(6), 775–779. Linda J. Skitka, Kathleen L. Mosier and Mark Burdick (1999), [Does automation bias decision-making?](https://doi.org/10.1006/ijhc.1999.0252), International Journal of Human-Computer Studies 51(5), 991–1006. A flight-simulation task with a monitoring aid, not a code-review trial.</a:t>
             </a:r>
             <a:endParaRPr lang="en-US" sz="1200"/>
           </a:p>
@@ -3884,7 +3930,7 @@
                 <a:ea typeface="Arial"/>
                 <a:cs typeface="Arial"/>
               </a:rPr>
-              <a:t xml:space="preserve">Where does the work actually wait?</a:t>
+              <a:t xml:space="preserve">Point at the queue</a:t>
             </a:r>
             <a:endParaRPr lang="en-US" sz="1200"/>
           </a:p>
@@ -3999,7 +4045,7 @@
                 <a:ea typeface="Arial"/>
                 <a:cs typeface="Arial"/>
               </a:rPr>
-              <a:t xml:space="preserve">&gt; Point at the queue before buying more throughput</a:t>
+              <a:t xml:space="preserve">&gt; Not where it takes skill. Where it sits untouched.</a:t>
             </a:r>
             <a:endParaRPr lang="en-US" sz="1200"/>
           </a:p>
@@ -4388,7 +4434,7 @@
                 <a:ea typeface="Arial"/>
                 <a:cs typeface="Arial"/>
               </a:rPr>
-              <a:t xml:space="preserve">![A queue does not care how you feel about it](../../reveal-talks/assets/judgment/queue.svg)</a:t>
+              <a:t xml:space="preserve">![Kingman: queue wait vs reviewer utilization, variability factor one](../../reveal-talks/assets/judgment/queue.svg)</a:t>
             </a:r>
             <a:endParaRPr lang="en-US" sz="1200"/>
           </a:p>
@@ -4595,7 +4641,7 @@
                 <a:ea typeface="Arial"/>
                 <a:cs typeface="Arial"/>
               </a:rPr>
-              <a:t xml:space="preserve">Little's law gives a separate accounting identity for a stable system: average work in progress equals throughput times average time in the system. Neither result says your team is literally one server. They tell us what to measure before claiming the reviewer just needs to try harder.</a:t>
+              <a:t xml:space="preserve">Little's law gives a separate accounting identity for a stable system: average work in progress equals throughput times average time in the system. They tell us what to measure before claiming the reviewer just needs to try harder.</a:t>
             </a:r>
             <a:endParaRPr lang="en-US" sz="1200"/>
           </a:p>
@@ -4800,7 +4846,7 @@
                 <a:ea typeface="Arial"/>
                 <a:cs typeface="Arial"/>
               </a:rPr>
-              <a:t xml:space="preserve">Your ceiling is the stage you did not speed up</a:t>
+              <a:t xml:space="preserve">The stage you didn't speed up</a:t>
             </a:r>
             <a:endParaRPr lang="en-US" sz="1200"/>
           </a:p>
@@ -5511,7 +5557,7 @@
                 <a:ea typeface="Arial"/>
                 <a:cs typeface="Arial"/>
               </a:rPr>
-              <a:t xml:space="preserve">Source: W. Edwards Deming’s Point 3, discussed by the [Deming Institute on software code reviews](https://deming.org/software-code-reviews-from-a-deming-perspective/).</a:t>
+              <a:t xml:space="preserve">Source: W. Edwards Deming (1986), Out of the Crisis, MIT Center for Advanced Engineering Study; Point 3 of the Fourteen Points. Applied to review by the [Deming Institute](https://deming.org/software-code-reviews-from-a-deming-perspective/).</a:t>
             </a:r>
             <a:endParaRPr lang="en-US" sz="1200"/>
           </a:p>
@@ -5992,7 +6038,7 @@
                 <a:ea typeface="Arial"/>
                 <a:cs typeface="Arial"/>
               </a:rPr>
-              <a:t xml:space="preserve">Stage direction: Read the request once. Give pairs a full 60 seconds, collect two answers, then introduce the tenant and revocation questions.</a:t>
+              <a:t xml:space="preserve">Stage direction: Read the request once. Give pairs sixty seconds here, thirty in the 15-minute cut. Collect two answers, then introduce the tenant and revocation questions.</a:t>
             </a:r>
             <a:endParaRPr lang="en-US" sz="1200"/>
           </a:p>
@@ -6381,7 +6427,7 @@
                 <a:ea typeface="Arial"/>
                 <a:cs typeface="Arial"/>
               </a:rPr>
-              <a:t xml:space="preserve">Tie this back to the curve. Clear boundaries reduce the number of interpretations arriving at review. Bounded diffs reduce the amount of code a reviewer has to reconstruct at once. That is an attempt to reduce service-time variance, not a claim that a document automatically changes a coefficient.</a:t>
+              <a:t xml:space="preserve">Tie this back to the curve. Clear boundaries reduce the number of interpretations arriving at review. Bounded diffs reduce the amount of code a reviewer has to reconstruct at once. That is the variance term. On purpose.</a:t>
             </a:r>
             <a:endParaRPr lang="en-US" sz="1200"/>
           </a:p>
@@ -7540,7 +7586,7 @@
                 <a:ea typeface="Arial"/>
                 <a:cs typeface="Arial"/>
               </a:rPr>
-              <a:t xml:space="preserve">canEdit(user) =</a:t>
+              <a:t xml:space="preserve">canEdit(user, resourceTenant) =</a:t>
             </a:r>
             <a:endParaRPr lang="en-US" sz="1500"/>
           </a:p>
@@ -7748,6 +7794,121 @@
                 <a:cs typeface="Arial"/>
               </a:rPr>
               <a:t xml:space="preserve">function allows the edit. The test passes.</a:t>
+            </a:r>
+            <a:endParaRPr lang="en-US" sz="1500"/>
+          </a:p>
+          <a:p>
+            <a:pPr marL="0" indent="0">
+              <a:lnSpc>
+                <a:spcPts val="1950"/>
+              </a:lnSpc>
+              <a:spcAft>
+                <a:spcPts val="0"/>
+              </a:spcAft>
+              <a:buNone/>
+            </a:pPr>
+            <a:r>
+              <a:rPr lang="en-US" sz="1500" b="0">
+                <a:solidFill>
+                  <a:srgbClr val="202B33"/>
+                </a:solidFill>
+                <a:latin typeface="Arial"/>
+                <a:ea typeface="Arial"/>
+                <a:cs typeface="Arial"/>
+              </a:rPr>
+              <a:t xml:space="preserve"/>
+            </a:r>
+            <a:endParaRPr lang="en-US" sz="1500"/>
+          </a:p>
+          <a:p>
+            <a:pPr marL="0" indent="0">
+              <a:lnSpc>
+                <a:spcPts val="1950"/>
+              </a:lnSpc>
+              <a:spcAft>
+                <a:spcPts val="0"/>
+              </a:spcAft>
+              <a:buNone/>
+            </a:pPr>
+            <a:r>
+              <a:rPr lang="en-US" sz="1500" b="0">
+                <a:solidFill>
+                  <a:srgbClr val="202B33"/>
+                </a:solidFill>
+                <a:latin typeface="Arial"/>
+                <a:ea typeface="Arial"/>
+                <a:cs typeface="Arial"/>
+              </a:rPr>
+              <a:t xml:space="preserve">The resource tenant is right there in the</a:t>
+            </a:r>
+            <a:endParaRPr lang="en-US" sz="1500"/>
+          </a:p>
+          <a:p>
+            <a:pPr marL="0" indent="0">
+              <a:lnSpc>
+                <a:spcPts val="1950"/>
+              </a:lnSpc>
+              <a:spcAft>
+                <a:spcPts val="0"/>
+              </a:spcAft>
+              <a:buNone/>
+            </a:pPr>
+            <a:r>
+              <a:rPr lang="en-US" sz="1500" b="0">
+                <a:solidFill>
+                  <a:srgbClr val="202B33"/>
+                </a:solidFill>
+                <a:latin typeface="Arial"/>
+                <a:ea typeface="Arial"/>
+                <a:cs typeface="Arial"/>
+              </a:rPr>
+              <a:t xml:space="preserve">signature. Nothing reads it. And you</a:t>
+            </a:r>
+            <a:endParaRPr lang="en-US" sz="1500"/>
+          </a:p>
+          <a:p>
+            <a:pPr marL="0" indent="0">
+              <a:lnSpc>
+                <a:spcPts val="1950"/>
+              </a:lnSpc>
+              <a:spcAft>
+                <a:spcPts val="0"/>
+              </a:spcAft>
+              <a:buNone/>
+            </a:pPr>
+            <a:r>
+              <a:rPr lang="en-US" sz="1500" b="0">
+                <a:solidFill>
+                  <a:srgbClr val="202B33"/>
+                </a:solidFill>
+                <a:latin typeface="Arial"/>
+                <a:ea typeface="Arial"/>
+                <a:cs typeface="Arial"/>
+              </a:rPr>
+              <a:t xml:space="preserve">already heard the cross-tenant case, back</a:t>
+            </a:r>
+            <a:endParaRPr lang="en-US" sz="1500"/>
+          </a:p>
+          <a:p>
+            <a:pPr marL="0" indent="0">
+              <a:lnSpc>
+                <a:spcPts val="1950"/>
+              </a:lnSpc>
+              <a:spcAft>
+                <a:spcPts val="0"/>
+              </a:spcAft>
+              <a:buNone/>
+            </a:pPr>
+            <a:r>
+              <a:rPr lang="en-US" sz="1500" b="0">
+                <a:solidFill>
+                  <a:srgbClr val="202B33"/>
+                </a:solidFill>
+                <a:latin typeface="Arial"/>
+                <a:ea typeface="Arial"/>
+                <a:cs typeface="Arial"/>
+              </a:rPr>
+              <a:t xml:space="preserve">on the spec slide. Watch the vote anyway.</a:t>
             </a:r>
             <a:endParaRPr lang="en-US" sz="1500"/>
           </a:p>
@@ -8072,145 +8233,260 @@
                 <a:ea typeface="Arial"/>
                 <a:cs typeface="Arial"/>
               </a:rPr>
-              <a:t xml:space="preserve">operator doing. Automation-bias experiments</a:t>
-            </a:r>
-            <a:endParaRPr lang="en-US" sz="1500"/>
-          </a:p>
-          <a:p>
-            <a:pPr marL="0" indent="0">
-              <a:lnSpc>
-                <a:spcPts val="1950"/>
-              </a:lnSpc>
-              <a:spcAft>
-                <a:spcPts val="0"/>
-              </a:spcAft>
-              <a:buNone/>
-            </a:pPr>
-            <a:r>
-              <a:rPr lang="en-US" sz="1500" b="0">
-                <a:solidFill>
-                  <a:srgbClr val="202B33"/>
-                </a:solidFill>
-                <a:latin typeface="Arial"/>
-                <a:ea typeface="Arial"/>
-                <a:cs typeface="Arial"/>
-              </a:rPr>
-              <a:t xml:space="preserve">ask what happens when people defer to a</a:t>
-            </a:r>
-            <a:endParaRPr lang="en-US" sz="1500"/>
-          </a:p>
-          <a:p>
-            <a:pPr marL="0" indent="0">
-              <a:lnSpc>
-                <a:spcPts val="1950"/>
-              </a:lnSpc>
-              <a:spcAft>
-                <a:spcPts val="0"/>
-              </a:spcAft>
-              <a:buNone/>
-            </a:pPr>
-            <a:r>
-              <a:rPr lang="en-US" sz="1500" b="0">
-                <a:solidFill>
-                  <a:srgbClr val="202B33"/>
-                </a:solidFill>
-                <a:latin typeface="Arial"/>
-                <a:ea typeface="Arial"/>
-                <a:cs typeface="Arial"/>
-              </a:rPr>
-              <a:t xml:space="preserve">decision aid despite other evidence. Those</a:t>
-            </a:r>
-            <a:endParaRPr lang="en-US" sz="1500"/>
-          </a:p>
-          <a:p>
-            <a:pPr marL="0" indent="0">
-              <a:lnSpc>
-                <a:spcPts val="1950"/>
-              </a:lnSpc>
-              <a:spcAft>
-                <a:spcPts val="0"/>
-              </a:spcAft>
-              <a:buNone/>
-            </a:pPr>
-            <a:r>
-              <a:rPr lang="en-US" sz="1500" b="0">
-                <a:solidFill>
-                  <a:srgbClr val="202B33"/>
-                </a:solidFill>
-                <a:latin typeface="Arial"/>
-                <a:ea typeface="Arial"/>
-                <a:cs typeface="Arial"/>
-              </a:rPr>
-              <a:t xml:space="preserve">experiments were not code-review trials.</a:t>
-            </a:r>
-            <a:endParaRPr lang="en-US" sz="1500"/>
-          </a:p>
-          <a:p>
-            <a:pPr marL="0" indent="0">
-              <a:lnSpc>
-                <a:spcPts val="1950"/>
-              </a:lnSpc>
-              <a:spcAft>
-                <a:spcPts val="0"/>
-              </a:spcAft>
-              <a:buNone/>
-            </a:pPr>
-            <a:r>
-              <a:rPr lang="en-US" sz="1500" b="0">
-                <a:solidFill>
-                  <a:srgbClr val="202B33"/>
-                </a:solidFill>
-                <a:latin typeface="Arial"/>
-                <a:ea typeface="Arial"/>
-                <a:cs typeface="Arial"/>
-              </a:rPr>
-              <a:t xml:space="preserve">This fixture is how the concern shows up in</a:t>
-            </a:r>
-            <a:endParaRPr lang="en-US" sz="1500"/>
-          </a:p>
-          <a:p>
-            <a:pPr marL="0" indent="0">
-              <a:lnSpc>
-                <a:spcPts val="1950"/>
-              </a:lnSpc>
-              <a:spcAft>
-                <a:spcPts val="0"/>
-              </a:spcAft>
-              <a:buNone/>
-            </a:pPr>
-            <a:r>
-              <a:rPr lang="en-US" sz="1500" b="0">
-                <a:solidFill>
-                  <a:srgbClr val="202B33"/>
-                </a:solidFill>
-                <a:latin typeface="Arial"/>
-                <a:ea typeface="Arial"/>
-                <a:cs typeface="Arial"/>
-              </a:rPr>
-              <a:t xml:space="preserve">our queue: the green signal gets attention</a:t>
-            </a:r>
-            <a:endParaRPr lang="en-US" sz="1500"/>
-          </a:p>
-          <a:p>
-            <a:pPr marL="0" indent="0">
-              <a:lnSpc>
-                <a:spcPts val="1950"/>
-              </a:lnSpc>
-              <a:spcAft>
-                <a:spcPts val="0"/>
-              </a:spcAft>
-              <a:buNone/>
-            </a:pPr>
-            <a:r>
-              <a:rPr lang="en-US" sz="1500" b="0">
-                <a:solidFill>
-                  <a:srgbClr val="202B33"/>
-                </a:solidFill>
-                <a:latin typeface="Arial"/>
-                <a:ea typeface="Arial"/>
-                <a:cs typeface="Arial"/>
-              </a:rPr>
-              <a:t xml:space="preserve">that the missing case did not.</a:t>
+              <a:t xml:space="preserve">operator doing. Skitka and colleagues put</a:t>
+            </a:r>
+            <a:endParaRPr lang="en-US" sz="1500"/>
+          </a:p>
+          <a:p>
+            <a:pPr marL="0" indent="0">
+              <a:lnSpc>
+                <a:spcPts val="1950"/>
+              </a:lnSpc>
+              <a:spcAft>
+                <a:spcPts val="0"/>
+              </a:spcAft>
+              <a:buNone/>
+            </a:pPr>
+            <a:r>
+              <a:rPr lang="en-US" sz="1500" b="0">
+                <a:solidFill>
+                  <a:srgbClr val="202B33"/>
+                </a:solidFill>
+                <a:latin typeface="Arial"/>
+                <a:ea typeface="Arial"/>
+                <a:cs typeface="Arial"/>
+              </a:rPr>
+              <a:t xml:space="preserve">people in a flight simulator with an</a:t>
+            </a:r>
+            <a:endParaRPr lang="en-US" sz="1500"/>
+          </a:p>
+          <a:p>
+            <a:pPr marL="0" indent="0">
+              <a:lnSpc>
+                <a:spcPts val="1950"/>
+              </a:lnSpc>
+              <a:spcAft>
+                <a:spcPts val="0"/>
+              </a:spcAft>
+              <a:buNone/>
+            </a:pPr>
+            <a:r>
+              <a:rPr lang="en-US" sz="1500" b="0">
+                <a:solidFill>
+                  <a:srgbClr val="202B33"/>
+                </a:solidFill>
+                <a:latin typeface="Arial"/>
+                <a:ea typeface="Arial"/>
+                <a:cs typeface="Arial"/>
+              </a:rPr>
+              <a:t xml:space="preserve">automated monitoring aid and counted the</a:t>
+            </a:r>
+            <a:endParaRPr lang="en-US" sz="1500"/>
+          </a:p>
+          <a:p>
+            <a:pPr marL="0" indent="0">
+              <a:lnSpc>
+                <a:spcPts val="1950"/>
+              </a:lnSpc>
+              <a:spcAft>
+                <a:spcPts val="0"/>
+              </a:spcAft>
+              <a:buNone/>
+            </a:pPr>
+            <a:r>
+              <a:rPr lang="en-US" sz="1500" b="0">
+                <a:solidFill>
+                  <a:srgbClr val="202B33"/>
+                </a:solidFill>
+                <a:latin typeface="Arial"/>
+                <a:ea typeface="Arial"/>
+                <a:cs typeface="Arial"/>
+              </a:rPr>
+              <a:t xml:space="preserve">trials where the aid was wrong. On those</a:t>
+            </a:r>
+            <a:endParaRPr lang="en-US" sz="1500"/>
+          </a:p>
+          <a:p>
+            <a:pPr marL="0" indent="0">
+              <a:lnSpc>
+                <a:spcPts val="1950"/>
+              </a:lnSpc>
+              <a:spcAft>
+                <a:spcPts val="0"/>
+              </a:spcAft>
+              <a:buNone/>
+            </a:pPr>
+            <a:r>
+              <a:rPr lang="en-US" sz="1500" b="0">
+                <a:solidFill>
+                  <a:srgbClr val="202B33"/>
+                </a:solidFill>
+                <a:latin typeface="Arial"/>
+                <a:ea typeface="Arial"/>
+                <a:cs typeface="Arial"/>
+              </a:rPr>
+              <a:t xml:space="preserve">trials people missed events the aid did not</a:t>
+            </a:r>
+            <a:endParaRPr lang="en-US" sz="1500"/>
+          </a:p>
+          <a:p>
+            <a:pPr marL="0" indent="0">
+              <a:lnSpc>
+                <a:spcPts val="1950"/>
+              </a:lnSpc>
+              <a:spcAft>
+                <a:spcPts val="0"/>
+              </a:spcAft>
+              <a:buNone/>
+            </a:pPr>
+            <a:r>
+              <a:rPr lang="en-US" sz="1500" b="0">
+                <a:solidFill>
+                  <a:srgbClr val="202B33"/>
+                </a:solidFill>
+                <a:latin typeface="Arial"/>
+                <a:ea typeface="Arial"/>
+                <a:cs typeface="Arial"/>
+              </a:rPr>
+              <a:t xml:space="preserve">flag, and acted on prompts the other</a:t>
+            </a:r>
+            <a:endParaRPr lang="en-US" sz="1500"/>
+          </a:p>
+          <a:p>
+            <a:pPr marL="0" indent="0">
+              <a:lnSpc>
+                <a:spcPts val="1950"/>
+              </a:lnSpc>
+              <a:spcAft>
+                <a:spcPts val="0"/>
+              </a:spcAft>
+              <a:buNone/>
+            </a:pPr>
+            <a:r>
+              <a:rPr lang="en-US" sz="1500" b="0">
+                <a:solidFill>
+                  <a:srgbClr val="202B33"/>
+                </a:solidFill>
+                <a:latin typeface="Arial"/>
+                <a:ea typeface="Arial"/>
+                <a:cs typeface="Arial"/>
+              </a:rPr>
+              <a:t xml:space="preserve">instruments contradicted. That is the whole</a:t>
+            </a:r>
+            <a:endParaRPr lang="en-US" sz="1500"/>
+          </a:p>
+          <a:p>
+            <a:pPr marL="0" indent="0">
+              <a:lnSpc>
+                <a:spcPts val="1950"/>
+              </a:lnSpc>
+              <a:spcAft>
+                <a:spcPts val="0"/>
+              </a:spcAft>
+              <a:buNone/>
+            </a:pPr>
+            <a:r>
+              <a:rPr lang="en-US" sz="1500" b="0">
+                <a:solidFill>
+                  <a:srgbClr val="202B33"/>
+                </a:solidFill>
+                <a:latin typeface="Arial"/>
+                <a:ea typeface="Arial"/>
+                <a:cs typeface="Arial"/>
+              </a:rPr>
+              <a:t xml:space="preserve">finding, and it is about the trials where</a:t>
+            </a:r>
+            <a:endParaRPr lang="en-US" sz="1500"/>
+          </a:p>
+          <a:p>
+            <a:pPr marL="0" indent="0">
+              <a:lnSpc>
+                <a:spcPts val="1950"/>
+              </a:lnSpc>
+              <a:spcAft>
+                <a:spcPts val="0"/>
+              </a:spcAft>
+              <a:buNone/>
+            </a:pPr>
+            <a:r>
+              <a:rPr lang="en-US" sz="1500" b="0">
+                <a:solidFill>
+                  <a:srgbClr val="202B33"/>
+                </a:solidFill>
+                <a:latin typeface="Arial"/>
+                <a:ea typeface="Arial"/>
+                <a:cs typeface="Arial"/>
+              </a:rPr>
+              <a:t xml:space="preserve">the aid was wrong. This fixture is how the</a:t>
+            </a:r>
+            <a:endParaRPr lang="en-US" sz="1500"/>
+          </a:p>
+          <a:p>
+            <a:pPr marL="0" indent="0">
+              <a:lnSpc>
+                <a:spcPts val="1950"/>
+              </a:lnSpc>
+              <a:spcAft>
+                <a:spcPts val="0"/>
+              </a:spcAft>
+              <a:buNone/>
+            </a:pPr>
+            <a:r>
+              <a:rPr lang="en-US" sz="1500" b="0">
+                <a:solidFill>
+                  <a:srgbClr val="202B33"/>
+                </a:solidFill>
+                <a:latin typeface="Arial"/>
+                <a:ea typeface="Arial"/>
+                <a:cs typeface="Arial"/>
+              </a:rPr>
+              <a:t xml:space="preserve">same concern shows up in our queue: the</a:t>
+            </a:r>
+            <a:endParaRPr lang="en-US" sz="1500"/>
+          </a:p>
+          <a:p>
+            <a:pPr marL="0" indent="0">
+              <a:lnSpc>
+                <a:spcPts val="1950"/>
+              </a:lnSpc>
+              <a:spcAft>
+                <a:spcPts val="0"/>
+              </a:spcAft>
+              <a:buNone/>
+            </a:pPr>
+            <a:r>
+              <a:rPr lang="en-US" sz="1500" b="0">
+                <a:solidFill>
+                  <a:srgbClr val="202B33"/>
+                </a:solidFill>
+                <a:latin typeface="Arial"/>
+                <a:ea typeface="Arial"/>
+                <a:cs typeface="Arial"/>
+              </a:rPr>
+              <a:t xml:space="preserve">green signal gets attention that the</a:t>
+            </a:r>
+            <a:endParaRPr lang="en-US" sz="1500"/>
+          </a:p>
+          <a:p>
+            <a:pPr marL="0" indent="0">
+              <a:lnSpc>
+                <a:spcPts val="1950"/>
+              </a:lnSpc>
+              <a:spcAft>
+                <a:spcPts val="0"/>
+              </a:spcAft>
+              <a:buNone/>
+            </a:pPr>
+            <a:r>
+              <a:rPr lang="en-US" sz="1500" b="0">
+                <a:solidFill>
+                  <a:srgbClr val="202B33"/>
+                </a:solidFill>
+                <a:latin typeface="Arial"/>
+                <a:ea typeface="Arial"/>
+                <a:cs typeface="Arial"/>
+              </a:rPr>
+              <a:t xml:space="preserve">missing case did not.</a:t>
             </a:r>
             <a:endParaRPr lang="en-US" sz="1500"/>
           </a:p>
@@ -8718,7 +8994,76 @@
                 <a:ea typeface="Arial"/>
                 <a:cs typeface="Arial"/>
               </a:rPr>
-              <a:t xml:space="preserve">looks excellent.</a:t>
+              <a:t xml:space="preserve">looks excellent. We did not remove the</a:t>
+            </a:r>
+            <a:endParaRPr lang="en-US" sz="1500"/>
+          </a:p>
+          <a:p>
+            <a:pPr marL="0" indent="0">
+              <a:lnSpc>
+                <a:spcPts val="1950"/>
+              </a:lnSpc>
+              <a:spcAft>
+                <a:spcPts val="0"/>
+              </a:spcAft>
+              <a:buNone/>
+            </a:pPr>
+            <a:r>
+              <a:rPr lang="en-US" sz="1500" b="0">
+                <a:solidFill>
+                  <a:srgbClr val="202B33"/>
+                </a:solidFill>
+                <a:latin typeface="Arial"/>
+                <a:ea typeface="Arial"/>
+                <a:cs typeface="Arial"/>
+              </a:rPr>
+              <a:t xml:space="preserve">bottleneck. We moved it onto one person and</a:t>
+            </a:r>
+            <a:endParaRPr lang="en-US" sz="1500"/>
+          </a:p>
+          <a:p>
+            <a:pPr marL="0" indent="0">
+              <a:lnSpc>
+                <a:spcPts val="1950"/>
+              </a:lnSpc>
+              <a:spcAft>
+                <a:spcPts val="0"/>
+              </a:spcAft>
+              <a:buNone/>
+            </a:pPr>
+            <a:r>
+              <a:rPr lang="en-US" sz="1500" b="0">
+                <a:solidFill>
+                  <a:srgbClr val="202B33"/>
+                </a:solidFill>
+                <a:latin typeface="Arial"/>
+                <a:ea typeface="Arial"/>
+                <a:cs typeface="Arial"/>
+              </a:rPr>
+              <a:t xml:space="preserve">gave them a keyboard shortcut for approving</a:t>
+            </a:r>
+            <a:endParaRPr lang="en-US" sz="1500"/>
+          </a:p>
+          <a:p>
+            <a:pPr marL="0" indent="0">
+              <a:lnSpc>
+                <a:spcPts val="1950"/>
+              </a:lnSpc>
+              <a:spcAft>
+                <a:spcPts val="0"/>
+              </a:spcAft>
+              <a:buNone/>
+            </a:pPr>
+            <a:r>
+              <a:rPr lang="en-US" sz="1500" b="0">
+                <a:solidFill>
+                  <a:srgbClr val="202B33"/>
+                </a:solidFill>
+                <a:latin typeface="Arial"/>
+                <a:ea typeface="Arial"/>
+                <a:cs typeface="Arial"/>
+              </a:rPr>
+              <a:t xml:space="preserve">things.</a:t>
             </a:r>
             <a:endParaRPr lang="en-US" sz="1500"/>
           </a:p>
@@ -8742,29 +9087,6 @@
                 <a:cs typeface="Arial"/>
               </a:rPr>
               <a:t xml:space="preserve"/>
-            </a:r>
-            <a:endParaRPr lang="en-US" sz="1500"/>
-          </a:p>
-          <a:p>
-            <a:pPr marL="0" indent="0">
-              <a:lnSpc>
-                <a:spcPts val="1950"/>
-              </a:lnSpc>
-              <a:spcAft>
-                <a:spcPts val="0"/>
-              </a:spcAft>
-              <a:buNone/>
-            </a:pPr>
-            <a:r>
-              <a:rPr lang="en-US" sz="1500" b="0">
-                <a:solidFill>
-                  <a:srgbClr val="202B33"/>
-                </a:solidFill>
-                <a:latin typeface="Arial"/>
-                <a:ea typeface="Arial"/>
-                <a:cs typeface="Arial"/>
-              </a:rPr>
-              <a:t xml:space="preserve">Can that person stop arrivals? Can they</a:t>
             </a:r>
             <a:endParaRPr lang="en-US" sz="1500"/>
           </a:p>
@@ -8794,6 +9116,29 @@
             <a:noAutofit/>
           </a:bodyPr>
           <a:lstStyle/>
+          <a:p>
+            <a:pPr marL="0" indent="0">
+              <a:lnSpc>
+                <a:spcPts val="1950"/>
+              </a:lnSpc>
+              <a:spcAft>
+                <a:spcPts val="0"/>
+              </a:spcAft>
+              <a:buNone/>
+            </a:pPr>
+            <a:r>
+              <a:rPr lang="en-US" sz="1500" b="0">
+                <a:solidFill>
+                  <a:srgbClr val="202B33"/>
+                </a:solidFill>
+                <a:latin typeface="Arial"/>
+                <a:ea typeface="Arial"/>
+                <a:cs typeface="Arial"/>
+              </a:rPr>
+              <a:t xml:space="preserve">Can that person stop arrivals? Can they</a:t>
+            </a:r>
+            <a:endParaRPr lang="en-US" sz="1500"/>
+          </a:p>
           <a:p>
             <a:pPr marL="0" indent="0">
               <a:lnSpc>
@@ -9551,53 +9896,30 @@
                 <a:ea typeface="Arial"/>
                 <a:cs typeface="Arial"/>
               </a:rPr>
-              <a:t xml:space="preserve">machine. Use that distinction here without</a:t>
-            </a:r>
-            <a:endParaRPr lang="en-US" sz="1500"/>
-          </a:p>
-          <a:p>
-            <a:pPr marL="0" indent="0">
-              <a:lnSpc>
-                <a:spcPts val="1950"/>
-              </a:lnSpc>
-              <a:spcAft>
-                <a:spcPts val="0"/>
-              </a:spcAft>
-              <a:buNone/>
-            </a:pPr>
-            <a:r>
-              <a:rPr lang="en-US" sz="1500" b="0">
-                <a:solidFill>
-                  <a:srgbClr val="202B33"/>
-                </a:solidFill>
-                <a:latin typeface="Arial"/>
-                <a:ea typeface="Arial"/>
-                <a:cs typeface="Arial"/>
-              </a:rPr>
-              <a:t xml:space="preserve">turning his old forecast into a timeless</a:t>
-            </a:r>
-            <a:endParaRPr lang="en-US" sz="1500"/>
-          </a:p>
-          <a:p>
-            <a:pPr marL="0" indent="0">
-              <a:lnSpc>
-                <a:spcPts val="1950"/>
-              </a:lnSpc>
-              <a:spcAft>
-                <a:spcPts val="0"/>
-              </a:spcAft>
-              <a:buNone/>
-            </a:pPr>
-            <a:r>
-              <a:rPr lang="en-US" sz="1500" b="0">
-                <a:solidFill>
-                  <a:srgbClr val="202B33"/>
-                </a:solidFill>
-                <a:latin typeface="Arial"/>
-                <a:ea typeface="Arial"/>
-                <a:cs typeface="Arial"/>
-              </a:rPr>
-              <a:t xml:space="preserve">speed limit.</a:t>
+              <a:t xml:space="preserve">machine. His forecast expired in 1996. The</a:t>
+            </a:r>
+            <a:endParaRPr lang="en-US" sz="1500"/>
+          </a:p>
+          <a:p>
+            <a:pPr marL="0" indent="0">
+              <a:lnSpc>
+                <a:spcPts val="1950"/>
+              </a:lnSpc>
+              <a:spcAft>
+                <a:spcPts val="0"/>
+              </a:spcAft>
+              <a:buNone/>
+            </a:pPr>
+            <a:r>
+              <a:rPr lang="en-US" sz="1500" b="0">
+                <a:solidFill>
+                  <a:srgbClr val="202B33"/>
+                </a:solidFill>
+                <a:latin typeface="Arial"/>
+                <a:ea typeface="Arial"/>
+                <a:cs typeface="Arial"/>
+              </a:rPr>
+              <a:t xml:space="preserve">distinction did not.</a:t>
             </a:r>
             <a:endParaRPr lang="en-US" sz="1500"/>
           </a:p>
@@ -10407,145 +10729,191 @@
                 <a:ea typeface="Arial"/>
                 <a:cs typeface="Arial"/>
               </a:rPr>
-              <a:t xml:space="preserve">should exist. It includes declining a</a:t>
-            </a:r>
-            <a:endParaRPr lang="en-US" sz="1500"/>
-          </a:p>
-          <a:p>
-            <a:pPr marL="0" indent="0">
-              <a:lnSpc>
-                <a:spcPts val="1950"/>
-              </a:lnSpc>
-              <a:spcAft>
-                <a:spcPts val="0"/>
-              </a:spcAft>
-              <a:buNone/>
-            </a:pPr>
-            <a:r>
-              <a:rPr lang="en-US" sz="1500" b="0">
-                <a:solidFill>
-                  <a:srgbClr val="202B33"/>
-                </a:solidFill>
-                <a:latin typeface="Arial"/>
-                <a:ea typeface="Arial"/>
-                <a:cs typeface="Arial"/>
-              </a:rPr>
-              <a:t xml:space="preserve">second implementation after the first</a:t>
-            </a:r>
-            <a:endParaRPr lang="en-US" sz="1500"/>
-          </a:p>
-          <a:p>
-            <a:pPr marL="0" indent="0">
-              <a:lnSpc>
-                <a:spcPts val="1950"/>
-              </a:lnSpc>
-              <a:spcAft>
-                <a:spcPts val="0"/>
-              </a:spcAft>
-              <a:buNone/>
-            </a:pPr>
-            <a:r>
-              <a:rPr lang="en-US" sz="1500" b="0">
-                <a:solidFill>
-                  <a:srgbClr val="202B33"/>
-                </a:solidFill>
-                <a:latin typeface="Arial"/>
-                <a:ea typeface="Arial"/>
-                <a:cs typeface="Arial"/>
-              </a:rPr>
-              <a:t xml:space="preserve">already met the need. Comparing fleets of</a:t>
-            </a:r>
-            <a:endParaRPr lang="en-US" sz="1500"/>
-          </a:p>
-          <a:p>
-            <a:pPr marL="0" indent="0">
-              <a:lnSpc>
-                <a:spcPts val="1950"/>
-              </a:lnSpc>
-              <a:spcAft>
-                <a:spcPts val="0"/>
-              </a:spcAft>
-              <a:buNone/>
-            </a:pPr>
-            <a:r>
-              <a:rPr lang="en-US" sz="1500" b="0">
-                <a:solidFill>
-                  <a:srgbClr val="202B33"/>
-                </a:solidFill>
-                <a:latin typeface="Arial"/>
-                <a:ea typeface="Arial"/>
-                <a:cs typeface="Arial"/>
-              </a:rPr>
-              <a:t xml:space="preserve">candidate agents belongs to Dynamic</a:t>
-            </a:r>
-            <a:endParaRPr lang="en-US" sz="1500"/>
-          </a:p>
-          <a:p>
-            <a:pPr marL="0" indent="0">
-              <a:lnSpc>
-                <a:spcPts val="1950"/>
-              </a:lnSpc>
-              <a:spcAft>
-                <a:spcPts val="0"/>
-              </a:spcAft>
-              <a:buNone/>
-            </a:pPr>
-            <a:r>
-              <a:rPr lang="en-US" sz="1500" b="0">
-                <a:solidFill>
-                  <a:srgbClr val="202B33"/>
-                </a:solidFill>
-                <a:latin typeface="Arial"/>
-                <a:ea typeface="Arial"/>
-                <a:cs typeface="Arial"/>
-              </a:rPr>
-              <a:t xml:space="preserve">Scaling. Here we are protecting the person</a:t>
-            </a:r>
-            <a:endParaRPr lang="en-US" sz="1500"/>
-          </a:p>
-          <a:p>
-            <a:pPr marL="0" indent="0">
-              <a:lnSpc>
-                <a:spcPts val="1950"/>
-              </a:lnSpc>
-              <a:spcAft>
-                <a:spcPts val="0"/>
-              </a:spcAft>
-              <a:buNone/>
-            </a:pPr>
-            <a:r>
-              <a:rPr lang="en-US" sz="1500" b="0">
-                <a:solidFill>
-                  <a:srgbClr val="202B33"/>
-                </a:solidFill>
-                <a:latin typeface="Arial"/>
-                <a:ea typeface="Arial"/>
-                <a:cs typeface="Arial"/>
-              </a:rPr>
-              <a:t xml:space="preserve">who accepts the resulting work.</a:t>
-            </a:r>
-            <a:endParaRPr lang="en-US" sz="1500"/>
-          </a:p>
-          <a:p>
-            <a:pPr marL="0" indent="0">
-              <a:lnSpc>
-                <a:spcPts val="1950"/>
-              </a:lnSpc>
-              <a:spcAft>
-                <a:spcPts val="0"/>
-              </a:spcAft>
-              <a:buNone/>
-            </a:pPr>
-            <a:r>
-              <a:rPr lang="en-US" sz="1500" b="0">
-                <a:solidFill>
-                  <a:srgbClr val="202B33"/>
-                </a:solidFill>
-                <a:latin typeface="Arial"/>
-                <a:ea typeface="Arial"/>
-                <a:cs typeface="Arial"/>
-              </a:rPr>
-              <a:t xml:space="preserve"/>
+              <a:t xml:space="preserve">should exist, including declining a second</a:t>
+            </a:r>
+            <a:endParaRPr lang="en-US" sz="1500"/>
+          </a:p>
+          <a:p>
+            <a:pPr marL="0" indent="0">
+              <a:lnSpc>
+                <a:spcPts val="1950"/>
+              </a:lnSpc>
+              <a:spcAft>
+                <a:spcPts val="0"/>
+              </a:spcAft>
+              <a:buNone/>
+            </a:pPr>
+            <a:r>
+              <a:rPr lang="en-US" sz="1500" b="0">
+                <a:solidFill>
+                  <a:srgbClr val="202B33"/>
+                </a:solidFill>
+                <a:latin typeface="Arial"/>
+                <a:ea typeface="Arial"/>
+                <a:cs typeface="Arial"/>
+              </a:rPr>
+              <a:t xml:space="preserve">implementation after the first already met</a:t>
+            </a:r>
+            <a:endParaRPr lang="en-US" sz="1500"/>
+          </a:p>
+          <a:p>
+            <a:pPr marL="0" indent="0">
+              <a:lnSpc>
+                <a:spcPts val="1950"/>
+              </a:lnSpc>
+              <a:spcAft>
+                <a:spcPts val="0"/>
+              </a:spcAft>
+              <a:buNone/>
+            </a:pPr>
+            <a:r>
+              <a:rPr lang="en-US" sz="1500" b="0">
+                <a:solidFill>
+                  <a:srgbClr val="202B33"/>
+                </a:solidFill>
+                <a:latin typeface="Arial"/>
+                <a:ea typeface="Arial"/>
+                <a:cs typeface="Arial"/>
+              </a:rPr>
+              <a:t xml:space="preserve">the need. That is a rule about review load,</a:t>
+            </a:r>
+            <a:endParaRPr lang="en-US" sz="1500"/>
+          </a:p>
+          <a:p>
+            <a:pPr marL="0" indent="0">
+              <a:lnSpc>
+                <a:spcPts val="1950"/>
+              </a:lnSpc>
+              <a:spcAft>
+                <a:spcPts val="0"/>
+              </a:spcAft>
+              <a:buNone/>
+            </a:pPr>
+            <a:r>
+              <a:rPr lang="en-US" sz="1500" b="0">
+                <a:solidFill>
+                  <a:srgbClr val="202B33"/>
+                </a:solidFill>
+                <a:latin typeface="Arial"/>
+                <a:ea typeface="Arial"/>
+                <a:cs typeface="Arial"/>
+              </a:rPr>
+              <a:t xml:space="preserve">not about generation: generate ten parallel</a:t>
+            </a:r>
+            <a:endParaRPr lang="en-US" sz="1500"/>
+          </a:p>
+          <a:p>
+            <a:pPr marL="0" indent="0">
+              <a:lnSpc>
+                <a:spcPts val="1950"/>
+              </a:lnSpc>
+              <a:spcAft>
+                <a:spcPts val="0"/>
+              </a:spcAft>
+              <a:buNone/>
+            </a:pPr>
+            <a:r>
+              <a:rPr lang="en-US" sz="1500" b="0">
+                <a:solidFill>
+                  <a:srgbClr val="202B33"/>
+                </a:solidFill>
+                <a:latin typeface="Arial"/>
+                <a:ea typeface="Arial"/>
+                <a:cs typeface="Arial"/>
+              </a:rPr>
+              <a:t xml:space="preserve">attempts if you like, as long as a gate</a:t>
+            </a:r>
+            <a:endParaRPr lang="en-US" sz="1500"/>
+          </a:p>
+          <a:p>
+            <a:pPr marL="0" indent="0">
+              <a:lnSpc>
+                <a:spcPts val="1950"/>
+              </a:lnSpc>
+              <a:spcAft>
+                <a:spcPts val="0"/>
+              </a:spcAft>
+              <a:buNone/>
+            </a:pPr>
+            <a:r>
+              <a:rPr lang="en-US" sz="1500" b="0">
+                <a:solidFill>
+                  <a:srgbClr val="202B33"/>
+                </a:solidFill>
+                <a:latin typeface="Arial"/>
+                <a:ea typeface="Arial"/>
+                <a:cs typeface="Arial"/>
+              </a:rPr>
+              <a:t xml:space="preserve">collapses them to one candidate before a</a:t>
+            </a:r>
+            <a:endParaRPr lang="en-US" sz="1500"/>
+          </a:p>
+          <a:p>
+            <a:pPr marL="0" indent="0">
+              <a:lnSpc>
+                <a:spcPts val="1950"/>
+              </a:lnSpc>
+              <a:spcAft>
+                <a:spcPts val="0"/>
+              </a:spcAft>
+              <a:buNone/>
+            </a:pPr>
+            <a:r>
+              <a:rPr lang="en-US" sz="1500" b="0">
+                <a:solidFill>
+                  <a:srgbClr val="202B33"/>
+                </a:solidFill>
+                <a:latin typeface="Arial"/>
+                <a:ea typeface="Arial"/>
+                <a:cs typeface="Arial"/>
+              </a:rPr>
+              <a:t xml:space="preserve">human reads any of them. Judging the ten is</a:t>
+            </a:r>
+            <a:endParaRPr lang="en-US" sz="1500"/>
+          </a:p>
+          <a:p>
+            <a:pPr marL="0" indent="0">
+              <a:lnSpc>
+                <a:spcPts val="1950"/>
+              </a:lnSpc>
+              <a:spcAft>
+                <a:spcPts val="0"/>
+              </a:spcAft>
+              <a:buNone/>
+            </a:pPr>
+            <a:r>
+              <a:rPr lang="en-US" sz="1500" b="0">
+                <a:solidFill>
+                  <a:srgbClr val="202B33"/>
+                </a:solidFill>
+                <a:latin typeface="Arial"/>
+                <a:ea typeface="Arial"/>
+                <a:cs typeface="Arial"/>
+              </a:rPr>
+              <a:t xml:space="preserve">Dynamic Scaling's talk, and its Council of</a:t>
+            </a:r>
+            <a:endParaRPr lang="en-US" sz="1500"/>
+          </a:p>
+          <a:p>
+            <a:pPr marL="0" indent="0">
+              <a:lnSpc>
+                <a:spcPts val="1950"/>
+              </a:lnSpc>
+              <a:spcAft>
+                <a:spcPts val="0"/>
+              </a:spcAft>
+              <a:buNone/>
+            </a:pPr>
+            <a:r>
+              <a:rPr lang="en-US" sz="1500" b="0">
+                <a:solidFill>
+                  <a:srgbClr val="202B33"/>
+                </a:solidFill>
+                <a:latin typeface="Arial"/>
+                <a:ea typeface="Arial"/>
+                <a:cs typeface="Arial"/>
+              </a:rPr>
+              <a:t xml:space="preserve">Guards eats nine. This one protects the</a:t>
             </a:r>
             <a:endParaRPr lang="en-US" sz="1500"/>
           </a:p>
@@ -10575,6 +10943,75 @@
             <a:noAutofit/>
           </a:bodyPr>
           <a:lstStyle/>
+          <a:p>
+            <a:pPr marL="0" indent="0">
+              <a:lnSpc>
+                <a:spcPts val="1950"/>
+              </a:lnSpc>
+              <a:spcAft>
+                <a:spcPts val="0"/>
+              </a:spcAft>
+              <a:buNone/>
+            </a:pPr>
+            <a:r>
+              <a:rPr lang="en-US" sz="1500" b="0">
+                <a:solidFill>
+                  <a:srgbClr val="202B33"/>
+                </a:solidFill>
+                <a:latin typeface="Arial"/>
+                <a:ea typeface="Arial"/>
+                <a:cs typeface="Arial"/>
+              </a:rPr>
+              <a:t xml:space="preserve">person who accepts the one that got</a:t>
+            </a:r>
+            <a:endParaRPr lang="en-US" sz="1500"/>
+          </a:p>
+          <a:p>
+            <a:pPr marL="0" indent="0">
+              <a:lnSpc>
+                <a:spcPts val="1950"/>
+              </a:lnSpc>
+              <a:spcAft>
+                <a:spcPts val="0"/>
+              </a:spcAft>
+              <a:buNone/>
+            </a:pPr>
+            <a:r>
+              <a:rPr lang="en-US" sz="1500" b="0">
+                <a:solidFill>
+                  <a:srgbClr val="202B33"/>
+                </a:solidFill>
+                <a:latin typeface="Arial"/>
+                <a:ea typeface="Arial"/>
+                <a:cs typeface="Arial"/>
+              </a:rPr>
+              <a:t xml:space="preserve">through.</a:t>
+            </a:r>
+            <a:endParaRPr lang="en-US" sz="1500"/>
+          </a:p>
+          <a:p>
+            <a:pPr marL="0" indent="0">
+              <a:lnSpc>
+                <a:spcPts val="1950"/>
+              </a:lnSpc>
+              <a:spcAft>
+                <a:spcPts val="0"/>
+              </a:spcAft>
+              <a:buNone/>
+            </a:pPr>
+            <a:r>
+              <a:rPr lang="en-US" sz="1500" b="0">
+                <a:solidFill>
+                  <a:srgbClr val="202B33"/>
+                </a:solidFill>
+                <a:latin typeface="Arial"/>
+                <a:ea typeface="Arial"/>
+                <a:cs typeface="Arial"/>
+              </a:rPr>
+              <a:t xml:space="preserve"/>
+            </a:r>
+            <a:endParaRPr lang="en-US" sz="1500"/>
+          </a:p>
           <a:p>
             <a:pPr marL="0" indent="0">
               <a:lnSpc>
@@ -12031,7 +12468,7 @@
       </p:sp>
       <p:pic>
         <p:nvPicPr>
-          <p:cNvPr id="5" name="8de9aa7b0e58010a491d155d2a0aaafbe5d48c9d4da5759fad5af686b3fce993" descr="Knowing when to stop"/>
+          <p:cNvPr id="5" name="8de9aa7b0e58010a491d155d2a0aaafbe5d48c9d4da5759fad5af686b3fce993" descr="Kingman: queue wait vs reviewer utilization, variability factor one"/>
           <p:cNvPicPr>
             <a:picLocks noChangeAspect="1"/>
           </p:cNvPicPr>
@@ -12266,7 +12703,7 @@
                 <a:ea typeface="Arial"/>
                 <a:cs typeface="Arial"/>
               </a:rPr>
-              <a:t xml:space="preserve">Ninety-five percent gives a nineteen-times wait in</a:t>
+              <a:t xml:space="preserve">Ninety-five percent utilization is not efficiency. It</a:t>
             </a:r>
             <a:endParaRPr lang="en-US" sz="1200"/>
           </a:p>
@@ -12315,7 +12752,7 @@
                 <a:ea typeface="Arial"/>
                 <a:cs typeface="Arial"/>
               </a:rPr>
-              <a:t xml:space="preserve">our model. We can argue about the model by measuring</a:t>
+              <a:t xml:space="preserve">is a nineteen-times wait with good posture. Argue</a:t>
             </a:r>
             <a:endParaRPr lang="en-US" sz="1200"/>
           </a:p>
@@ -12338,7 +12775,7 @@
                 <a:ea typeface="Arial"/>
                 <a:cs typeface="Arial"/>
               </a:rPr>
-              <a:t xml:space="preserve">arrivals, service time, and variability. We cannot</a:t>
+              <a:t xml:space="preserve">with the model by measuring arrivals, service time,</a:t>
             </a:r>
             <a:endParaRPr lang="en-US" sz="1200"/>
           </a:p>
@@ -12361,7 +12798,7 @@
                 <a:ea typeface="Arial"/>
                 <a:cs typeface="Arial"/>
               </a:rPr>
-              <a:t xml:space="preserve">argue the queue away by pointing at how quickly the</a:t>
+              <a:t xml:space="preserve">and variability. You cannot argue the queue away by</a:t>
             </a:r>
             <a:endParaRPr lang="en-US" sz="1200"/>
           </a:p>
@@ -12384,7 +12821,7 @@
                 <a:ea typeface="Arial"/>
                 <a:cs typeface="Arial"/>
               </a:rPr>
-              <a:t xml:space="preserve">code appeared.</a:t>
+              <a:t xml:space="preserve">pointing at how quickly the code appeared.</a:t>
             </a:r>
             <a:endParaRPr lang="en-US" sz="1200"/>
           </a:p>
@@ -13099,76 +13536,76 @@
                 <a:ea typeface="Arial"/>
                 <a:cs typeface="Arial"/>
               </a:rPr>
-              <a:t xml:space="preserve">W. Edwards Deming’s Point 3, discussed by</a:t>
-            </a:r>
-            <a:endParaRPr lang="en-US" sz="1500"/>
-          </a:p>
-          <a:p>
-            <a:pPr marL="0" indent="0">
-              <a:lnSpc>
-                <a:spcPts val="1950"/>
-              </a:lnSpc>
-              <a:spcAft>
-                <a:spcPts val="0"/>
-              </a:spcAft>
-              <a:buNone/>
-            </a:pPr>
-            <a:r>
-              <a:rPr lang="en-US" sz="1500" b="0">
-                <a:solidFill>
-                  <a:srgbClr val="202B33"/>
-                </a:solidFill>
-                <a:latin typeface="Arial"/>
-                <a:ea typeface="Arial"/>
-                <a:cs typeface="Arial"/>
-              </a:rPr>
-              <a:t xml:space="preserve">the Deming Institute on software code</a:t>
-            </a:r>
-            <a:endParaRPr lang="en-US" sz="1500"/>
-          </a:p>
-          <a:p>
-            <a:pPr marL="0" indent="0">
-              <a:lnSpc>
-                <a:spcPts val="1950"/>
-              </a:lnSpc>
-              <a:spcAft>
-                <a:spcPts val="0"/>
-              </a:spcAft>
-              <a:buNone/>
-            </a:pPr>
-            <a:r>
-              <a:rPr lang="en-US" sz="1500" b="0">
-                <a:solidFill>
-                  <a:srgbClr val="202B33"/>
-                </a:solidFill>
-                <a:latin typeface="Arial"/>
-                <a:ea typeface="Arial"/>
-                <a:cs typeface="Arial"/>
-              </a:rPr>
-              <a:t xml:space="preserve">reviews —</a:t>
-            </a:r>
-            <a:endParaRPr lang="en-US" sz="1500"/>
-          </a:p>
-          <a:p>
-            <a:pPr marL="0" indent="0">
-              <a:lnSpc>
-                <a:spcPts val="1950"/>
-              </a:lnSpc>
-              <a:spcAft>
-                <a:spcPts val="0"/>
-              </a:spcAft>
-              <a:buNone/>
-            </a:pPr>
-            <a:r>
-              <a:rPr lang="en-US" sz="1500" b="0">
-                <a:solidFill>
-                  <a:srgbClr val="202B33"/>
-                </a:solidFill>
-                <a:latin typeface="Arial"/>
-                <a:ea typeface="Arial"/>
-                <a:cs typeface="Arial"/>
-              </a:rPr>
-              <a:t xml:space="preserve">https://deming.org/software-code-reviews-from-a-deming-perspective/.</a:t>
+              <a:t xml:space="preserve">W. Edwards Deming (1986), Out of the</a:t>
+            </a:r>
+            <a:endParaRPr lang="en-US" sz="1500"/>
+          </a:p>
+          <a:p>
+            <a:pPr marL="0" indent="0">
+              <a:lnSpc>
+                <a:spcPts val="1950"/>
+              </a:lnSpc>
+              <a:spcAft>
+                <a:spcPts val="0"/>
+              </a:spcAft>
+              <a:buNone/>
+            </a:pPr>
+            <a:r>
+              <a:rPr lang="en-US" sz="1500" b="0">
+                <a:solidFill>
+                  <a:srgbClr val="202B33"/>
+                </a:solidFill>
+                <a:latin typeface="Arial"/>
+                <a:ea typeface="Arial"/>
+                <a:cs typeface="Arial"/>
+              </a:rPr>
+              <a:t xml:space="preserve">Crisis, MIT Center for Advanced Engineering</a:t>
+            </a:r>
+            <a:endParaRPr lang="en-US" sz="1500"/>
+          </a:p>
+          <a:p>
+            <a:pPr marL="0" indent="0">
+              <a:lnSpc>
+                <a:spcPts val="1950"/>
+              </a:lnSpc>
+              <a:spcAft>
+                <a:spcPts val="0"/>
+              </a:spcAft>
+              <a:buNone/>
+            </a:pPr>
+            <a:r>
+              <a:rPr lang="en-US" sz="1500" b="0">
+                <a:solidFill>
+                  <a:srgbClr val="202B33"/>
+                </a:solidFill>
+                <a:latin typeface="Arial"/>
+                <a:ea typeface="Arial"/>
+                <a:cs typeface="Arial"/>
+              </a:rPr>
+              <a:t xml:space="preserve">Study; Point 3 of the Fourteen Points.</a:t>
+            </a:r>
+            <a:endParaRPr lang="en-US" sz="1500"/>
+          </a:p>
+          <a:p>
+            <a:pPr marL="0" indent="0">
+              <a:lnSpc>
+                <a:spcPts val="1950"/>
+              </a:lnSpc>
+              <a:spcAft>
+                <a:spcPts val="0"/>
+              </a:spcAft>
+              <a:buNone/>
+            </a:pPr>
+            <a:r>
+              <a:rPr lang="en-US" sz="1500" b="0">
+                <a:solidFill>
+                  <a:srgbClr val="202B33"/>
+                </a:solidFill>
+                <a:latin typeface="Arial"/>
+                <a:ea typeface="Arial"/>
+                <a:cs typeface="Arial"/>
+              </a:rPr>
+              <a:t xml:space="preserve">Applied to review by the Deming Institute —</a:t>
             </a:r>
             <a:endParaRPr lang="en-US" sz="1500"/>
           </a:p>
@@ -13217,6 +13654,29 @@
                 <a:ea typeface="Arial"/>
                 <a:cs typeface="Arial"/>
               </a:rPr>
+              <a:t xml:space="preserve">https://deming.org/software-code-reviews-from-a-deming-perspective/.</a:t>
+            </a:r>
+            <a:endParaRPr lang="en-US" sz="1500"/>
+          </a:p>
+          <a:p>
+            <a:pPr marL="0" indent="0">
+              <a:lnSpc>
+                <a:spcPts val="1950"/>
+              </a:lnSpc>
+              <a:spcAft>
+                <a:spcPts val="0"/>
+              </a:spcAft>
+              <a:buNone/>
+            </a:pPr>
+            <a:r>
+              <a:rPr lang="en-US" sz="1500" b="0">
+                <a:solidFill>
+                  <a:srgbClr val="202B33"/>
+                </a:solidFill>
+                <a:latin typeface="Arial"/>
+                <a:ea typeface="Arial"/>
+                <a:cs typeface="Arial"/>
+              </a:rPr>
               <a:t xml:space="preserve"/>
             </a:r>
             <a:endParaRPr lang="en-US" sz="1500"/>
@@ -13378,260 +13838,237 @@
                 <a:ea typeface="Arial"/>
                 <a:cs typeface="Arial"/>
               </a:rPr>
-              <a:t xml:space="preserve">Bainbridge (1983), Ironies of automation —</a:t>
-            </a:r>
-            <a:endParaRPr lang="en-US" sz="1500"/>
-          </a:p>
-          <a:p>
-            <a:pPr marL="0" indent="0">
-              <a:lnSpc>
-                <a:spcPts val="1950"/>
-              </a:lnSpc>
-              <a:spcAft>
-                <a:spcPts val="0"/>
-              </a:spcAft>
-              <a:buNone/>
-            </a:pPr>
-            <a:r>
-              <a:rPr lang="en-US" sz="1500" b="0">
-                <a:solidFill>
-                  <a:srgbClr val="202B33"/>
-                </a:solidFill>
-                <a:latin typeface="Arial"/>
-                <a:ea typeface="Arial"/>
-                <a:cs typeface="Arial"/>
-              </a:rPr>
-              <a:t xml:space="preserve">https://www.sciencedirect.com/science/article/pii/0005109883900468).</a:t>
-            </a:r>
-            <a:endParaRPr lang="en-US" sz="1500"/>
-          </a:p>
-          <a:p>
-            <a:pPr marL="0" indent="0">
-              <a:lnSpc>
-                <a:spcPts val="1950"/>
-              </a:lnSpc>
-              <a:spcAft>
-                <a:spcPts val="0"/>
-              </a:spcAft>
-              <a:buNone/>
-            </a:pPr>
-            <a:r>
-              <a:rPr lang="en-US" sz="1500" b="0">
-                <a:solidFill>
-                  <a:srgbClr val="202B33"/>
-                </a:solidFill>
-                <a:latin typeface="Arial"/>
-                <a:ea typeface="Arial"/>
-                <a:cs typeface="Arial"/>
-              </a:rPr>
-              <a:t xml:space="preserve">Mosier and Skitka (1999), [Automation Use</a:t>
-            </a:r>
-            <a:endParaRPr lang="en-US" sz="1500"/>
-          </a:p>
-          <a:p>
-            <a:pPr marL="0" indent="0">
-              <a:lnSpc>
-                <a:spcPts val="1950"/>
-              </a:lnSpc>
-              <a:spcAft>
-                <a:spcPts val="0"/>
-              </a:spcAft>
-              <a:buNone/>
-            </a:pPr>
-            <a:r>
-              <a:rPr lang="en-US" sz="1500" b="0">
-                <a:solidFill>
-                  <a:srgbClr val="202B33"/>
-                </a:solidFill>
-                <a:latin typeface="Arial"/>
-                <a:ea typeface="Arial"/>
-                <a:cs typeface="Arial"/>
-              </a:rPr>
-              <a:t xml:space="preserve">and Automation</a:t>
-            </a:r>
-            <a:endParaRPr lang="en-US" sz="1500"/>
-          </a:p>
-          <a:p>
-            <a:pPr marL="0" indent="0">
-              <a:lnSpc>
-                <a:spcPts val="1950"/>
-              </a:lnSpc>
-              <a:spcAft>
-                <a:spcPts val="0"/>
-              </a:spcAft>
-              <a:buNone/>
-            </a:pPr>
-            <a:r>
-              <a:rPr lang="en-US" sz="1500" b="0">
-                <a:solidFill>
-                  <a:srgbClr val="202B33"/>
-                </a:solidFill>
-                <a:latin typeface="Arial"/>
-                <a:ea typeface="Arial"/>
-                <a:cs typeface="Arial"/>
-              </a:rPr>
-              <a:t xml:space="preserve">Bias](https://journals.sagepub.com/doi/10.1177/154193129904300346.</a:t>
-            </a:r>
-            <a:endParaRPr lang="en-US" sz="1500"/>
-          </a:p>
-          <a:p>
-            <a:pPr marL="0" indent="0">
-              <a:lnSpc>
-                <a:spcPts val="1950"/>
-              </a:lnSpc>
-              <a:spcAft>
-                <a:spcPts val="0"/>
-              </a:spcAft>
-              <a:buNone/>
-            </a:pPr>
-            <a:r>
-              <a:rPr lang="en-US" sz="1500" b="0">
-                <a:solidFill>
-                  <a:srgbClr val="202B33"/>
-                </a:solidFill>
-                <a:latin typeface="Arial"/>
-                <a:ea typeface="Arial"/>
-                <a:cs typeface="Arial"/>
-              </a:rPr>
-              <a:t xml:space="preserve"/>
-            </a:r>
-            <a:endParaRPr lang="en-US" sz="1500"/>
-          </a:p>
-          <a:p>
-            <a:pPr marL="0" indent="0">
-              <a:lnSpc>
-                <a:spcPts val="1950"/>
-              </a:lnSpc>
-              <a:spcAft>
-                <a:spcPts val="0"/>
-              </a:spcAft>
-              <a:buNone/>
-            </a:pPr>
-            <a:r>
-              <a:rPr lang="en-US" sz="1500" b="0">
-                <a:solidFill>
-                  <a:srgbClr val="202B33"/>
-                </a:solidFill>
-                <a:latin typeface="Arial"/>
-                <a:ea typeface="Arial"/>
-                <a:cs typeface="Arial"/>
-              </a:rPr>
-              <a:t xml:space="preserve">Madeleine Clare Elish (2019), Moral Crumple</a:t>
-            </a:r>
-            <a:endParaRPr lang="en-US" sz="1500"/>
-          </a:p>
-          <a:p>
-            <a:pPr marL="0" indent="0">
-              <a:lnSpc>
-                <a:spcPts val="1950"/>
-              </a:lnSpc>
-              <a:spcAft>
-                <a:spcPts val="0"/>
-              </a:spcAft>
-              <a:buNone/>
-            </a:pPr>
-            <a:r>
-              <a:rPr lang="en-US" sz="1500" b="0">
-                <a:solidFill>
-                  <a:srgbClr val="202B33"/>
-                </a:solidFill>
-                <a:latin typeface="Arial"/>
-                <a:ea typeface="Arial"/>
-                <a:cs typeface="Arial"/>
-              </a:rPr>
-              <a:t xml:space="preserve">Zones: Cautionary Tales in Human-Robot</a:t>
-            </a:r>
-            <a:endParaRPr lang="en-US" sz="1500"/>
-          </a:p>
-          <a:p>
-            <a:pPr marL="0" indent="0">
-              <a:lnSpc>
-                <a:spcPts val="1950"/>
-              </a:lnSpc>
-              <a:spcAft>
-                <a:spcPts val="0"/>
-              </a:spcAft>
-              <a:buNone/>
-            </a:pPr>
-            <a:r>
-              <a:rPr lang="en-US" sz="1500" b="0">
-                <a:solidFill>
-                  <a:srgbClr val="202B33"/>
-                </a:solidFill>
-                <a:latin typeface="Arial"/>
-                <a:ea typeface="Arial"/>
-                <a:cs typeface="Arial"/>
-              </a:rPr>
-              <a:t xml:space="preserve">Interaction —</a:t>
-            </a:r>
-            <a:endParaRPr lang="en-US" sz="1500"/>
-          </a:p>
-          <a:p>
-            <a:pPr marL="0" indent="0">
-              <a:lnSpc>
-                <a:spcPts val="1950"/>
-              </a:lnSpc>
-              <a:spcAft>
-                <a:spcPts val="0"/>
-              </a:spcAft>
-              <a:buNone/>
-            </a:pPr>
-            <a:r>
-              <a:rPr lang="en-US" sz="1500" b="0">
-                <a:solidFill>
-                  <a:srgbClr val="202B33"/>
-                </a:solidFill>
-                <a:latin typeface="Arial"/>
-                <a:ea typeface="Arial"/>
-                <a:cs typeface="Arial"/>
-              </a:rPr>
-              <a:t xml:space="preserve">https://estsjournal.org/index.php/ests/article/download/260/177/,</a:t>
-            </a:r>
-            <a:endParaRPr lang="en-US" sz="1500"/>
-          </a:p>
-          <a:p>
-            <a:pPr marL="0" indent="0">
-              <a:lnSpc>
-                <a:spcPts val="1950"/>
-              </a:lnSpc>
-              <a:spcAft>
-                <a:spcPts val="0"/>
-              </a:spcAft>
-              <a:buNone/>
-            </a:pPr>
-            <a:r>
-              <a:rPr lang="en-US" sz="1500" b="0">
-                <a:solidFill>
-                  <a:srgbClr val="202B33"/>
-                </a:solidFill>
-                <a:latin typeface="Arial"/>
-                <a:ea typeface="Arial"/>
-                <a:cs typeface="Arial"/>
-              </a:rPr>
-              <a:t xml:space="preserve">Engaging Science, Technology, and Society</a:t>
-            </a:r>
-            <a:endParaRPr lang="en-US" sz="1500"/>
-          </a:p>
-          <a:p>
-            <a:pPr marL="0" indent="0">
-              <a:lnSpc>
-                <a:spcPts val="1950"/>
-              </a:lnSpc>
-              <a:spcAft>
-                <a:spcPts val="0"/>
-              </a:spcAft>
-              <a:buNone/>
-            </a:pPr>
-            <a:r>
-              <a:rPr lang="en-US" sz="1500" b="0">
-                <a:solidFill>
-                  <a:srgbClr val="202B33"/>
-                </a:solidFill>
-                <a:latin typeface="Arial"/>
-                <a:ea typeface="Arial"/>
-                <a:cs typeface="Arial"/>
-              </a:rPr>
-              <a:t xml:space="preserve">5, 40–60.</a:t>
+              <a:t xml:space="preserve">Lisanne Bainbridge (1983), Ironies of</a:t>
+            </a:r>
+            <a:endParaRPr lang="en-US" sz="1500"/>
+          </a:p>
+          <a:p>
+            <a:pPr marL="0" indent="0">
+              <a:lnSpc>
+                <a:spcPts val="1950"/>
+              </a:lnSpc>
+              <a:spcAft>
+                <a:spcPts val="0"/>
+              </a:spcAft>
+              <a:buNone/>
+            </a:pPr>
+            <a:r>
+              <a:rPr lang="en-US" sz="1500" b="0">
+                <a:solidFill>
+                  <a:srgbClr val="202B33"/>
+                </a:solidFill>
+                <a:latin typeface="Arial"/>
+                <a:ea typeface="Arial"/>
+                <a:cs typeface="Arial"/>
+              </a:rPr>
+              <a:t xml:space="preserve">automation —</a:t>
+            </a:r>
+            <a:endParaRPr lang="en-US" sz="1500"/>
+          </a:p>
+          <a:p>
+            <a:pPr marL="0" indent="0">
+              <a:lnSpc>
+                <a:spcPts val="1950"/>
+              </a:lnSpc>
+              <a:spcAft>
+                <a:spcPts val="0"/>
+              </a:spcAft>
+              <a:buNone/>
+            </a:pPr>
+            <a:r>
+              <a:rPr lang="en-US" sz="1500" b="0">
+                <a:solidFill>
+                  <a:srgbClr val="202B33"/>
+                </a:solidFill>
+                <a:latin typeface="Arial"/>
+                <a:ea typeface="Arial"/>
+                <a:cs typeface="Arial"/>
+              </a:rPr>
+              <a:t xml:space="preserve">https://www.sciencedirect.com/science/article/pii/0005109883900468),</a:t>
+            </a:r>
+            <a:endParaRPr lang="en-US" sz="1500"/>
+          </a:p>
+          <a:p>
+            <a:pPr marL="0" indent="0">
+              <a:lnSpc>
+                <a:spcPts val="1950"/>
+              </a:lnSpc>
+              <a:spcAft>
+                <a:spcPts val="0"/>
+              </a:spcAft>
+              <a:buNone/>
+            </a:pPr>
+            <a:r>
+              <a:rPr lang="en-US" sz="1500" b="0">
+                <a:solidFill>
+                  <a:srgbClr val="202B33"/>
+                </a:solidFill>
+                <a:latin typeface="Arial"/>
+                <a:ea typeface="Arial"/>
+                <a:cs typeface="Arial"/>
+              </a:rPr>
+              <a:t xml:space="preserve">Automatica 19(6), 775–779. Linda J. Skitka,</a:t>
+            </a:r>
+            <a:endParaRPr lang="en-US" sz="1500"/>
+          </a:p>
+          <a:p>
+            <a:pPr marL="0" indent="0">
+              <a:lnSpc>
+                <a:spcPts val="1950"/>
+              </a:lnSpc>
+              <a:spcAft>
+                <a:spcPts val="0"/>
+              </a:spcAft>
+              <a:buNone/>
+            </a:pPr>
+            <a:r>
+              <a:rPr lang="en-US" sz="1500" b="0">
+                <a:solidFill>
+                  <a:srgbClr val="202B33"/>
+                </a:solidFill>
+                <a:latin typeface="Arial"/>
+                <a:ea typeface="Arial"/>
+                <a:cs typeface="Arial"/>
+              </a:rPr>
+              <a:t xml:space="preserve">Kathleen L. Mosier and Mark Burdick (1999),</a:t>
+            </a:r>
+            <a:endParaRPr lang="en-US" sz="1500"/>
+          </a:p>
+          <a:p>
+            <a:pPr marL="0" indent="0">
+              <a:lnSpc>
+                <a:spcPts val="1950"/>
+              </a:lnSpc>
+              <a:spcAft>
+                <a:spcPts val="0"/>
+              </a:spcAft>
+              <a:buNone/>
+            </a:pPr>
+            <a:r>
+              <a:rPr lang="en-US" sz="1500" b="0">
+                <a:solidFill>
+                  <a:srgbClr val="202B33"/>
+                </a:solidFill>
+                <a:latin typeface="Arial"/>
+                <a:ea typeface="Arial"/>
+                <a:cs typeface="Arial"/>
+              </a:rPr>
+              <a:t xml:space="preserve">[Does automation bias</a:t>
+            </a:r>
+            <a:endParaRPr lang="en-US" sz="1500"/>
+          </a:p>
+          <a:p>
+            <a:pPr marL="0" indent="0">
+              <a:lnSpc>
+                <a:spcPts val="1950"/>
+              </a:lnSpc>
+              <a:spcAft>
+                <a:spcPts val="0"/>
+              </a:spcAft>
+              <a:buNone/>
+            </a:pPr>
+            <a:r>
+              <a:rPr lang="en-US" sz="1500" b="0">
+                <a:solidFill>
+                  <a:srgbClr val="202B33"/>
+                </a:solidFill>
+                <a:latin typeface="Arial"/>
+                <a:ea typeface="Arial"/>
+                <a:cs typeface="Arial"/>
+              </a:rPr>
+              <a:t xml:space="preserve">decision-making?](https://doi.org/10.1006/ijhc.1999.0252),</a:t>
+            </a:r>
+            <a:endParaRPr lang="en-US" sz="1500"/>
+          </a:p>
+          <a:p>
+            <a:pPr marL="0" indent="0">
+              <a:lnSpc>
+                <a:spcPts val="1950"/>
+              </a:lnSpc>
+              <a:spcAft>
+                <a:spcPts val="0"/>
+              </a:spcAft>
+              <a:buNone/>
+            </a:pPr>
+            <a:r>
+              <a:rPr lang="en-US" sz="1500" b="0">
+                <a:solidFill>
+                  <a:srgbClr val="202B33"/>
+                </a:solidFill>
+                <a:latin typeface="Arial"/>
+                <a:ea typeface="Arial"/>
+                <a:cs typeface="Arial"/>
+              </a:rPr>
+              <a:t xml:space="preserve">International Journal of Human-Computer</a:t>
+            </a:r>
+            <a:endParaRPr lang="en-US" sz="1500"/>
+          </a:p>
+          <a:p>
+            <a:pPr marL="0" indent="0">
+              <a:lnSpc>
+                <a:spcPts val="1950"/>
+              </a:lnSpc>
+              <a:spcAft>
+                <a:spcPts val="0"/>
+              </a:spcAft>
+              <a:buNone/>
+            </a:pPr>
+            <a:r>
+              <a:rPr lang="en-US" sz="1500" b="0">
+                <a:solidFill>
+                  <a:srgbClr val="202B33"/>
+                </a:solidFill>
+                <a:latin typeface="Arial"/>
+                <a:ea typeface="Arial"/>
+                <a:cs typeface="Arial"/>
+              </a:rPr>
+              <a:t xml:space="preserve">Studies 51(5, 991–1006. A flight-simulation</a:t>
+            </a:r>
+            <a:endParaRPr lang="en-US" sz="1500"/>
+          </a:p>
+          <a:p>
+            <a:pPr marL="0" indent="0">
+              <a:lnSpc>
+                <a:spcPts val="1950"/>
+              </a:lnSpc>
+              <a:spcAft>
+                <a:spcPts val="0"/>
+              </a:spcAft>
+              <a:buNone/>
+            </a:pPr>
+            <a:r>
+              <a:rPr lang="en-US" sz="1500" b="0">
+                <a:solidFill>
+                  <a:srgbClr val="202B33"/>
+                </a:solidFill>
+                <a:latin typeface="Arial"/>
+                <a:ea typeface="Arial"/>
+                <a:cs typeface="Arial"/>
+              </a:rPr>
+              <a:t xml:space="preserve">task with a monitoring aid, not a</a:t>
+            </a:r>
+            <a:endParaRPr lang="en-US" sz="1500"/>
+          </a:p>
+          <a:p>
+            <a:pPr marL="0" indent="0">
+              <a:lnSpc>
+                <a:spcPts val="1950"/>
+              </a:lnSpc>
+              <a:spcAft>
+                <a:spcPts val="0"/>
+              </a:spcAft>
+              <a:buNone/>
+            </a:pPr>
+            <a:r>
+              <a:rPr lang="en-US" sz="1500" b="0">
+                <a:solidFill>
+                  <a:srgbClr val="202B33"/>
+                </a:solidFill>
+                <a:latin typeface="Arial"/>
+                <a:ea typeface="Arial"/>
+                <a:cs typeface="Arial"/>
+              </a:rPr>
+              <a:t xml:space="preserve">code-review trial.</a:t>
             </a:r>
             <a:endParaRPr lang="en-US" sz="1500"/>
           </a:p>
@@ -13909,53 +14346,145 @@
                 <a:ea typeface="Arial"/>
                 <a:cs typeface="Arial"/>
               </a:rPr>
-              <a:t xml:space="preserve">Frederick P. Brooks Jr., No Silver Bullet:</a:t>
-            </a:r>
-            <a:endParaRPr lang="en-US" sz="1500"/>
-          </a:p>
-          <a:p>
-            <a:pPr marL="0" indent="0">
-              <a:lnSpc>
-                <a:spcPts val="1950"/>
-              </a:lnSpc>
-              <a:spcAft>
-                <a:spcPts val="0"/>
-              </a:spcAft>
-              <a:buNone/>
-            </a:pPr>
-            <a:r>
-              <a:rPr lang="en-US" sz="1500" b="0">
-                <a:solidFill>
-                  <a:srgbClr val="202B33"/>
-                </a:solidFill>
-                <a:latin typeface="Arial"/>
-                <a:ea typeface="Arial"/>
-                <a:cs typeface="Arial"/>
-              </a:rPr>
-              <a:t xml:space="preserve">Essence and Accidents of Software</a:t>
-            </a:r>
-            <a:endParaRPr lang="en-US" sz="1500"/>
-          </a:p>
-          <a:p>
-            <a:pPr marL="0" indent="0">
-              <a:lnSpc>
-                <a:spcPts val="1950"/>
-              </a:lnSpc>
-              <a:spcAft>
-                <a:spcPts val="0"/>
-              </a:spcAft>
-              <a:buNone/>
-            </a:pPr>
-            <a:r>
-              <a:rPr lang="en-US" sz="1500" b="0">
-                <a:solidFill>
-                  <a:srgbClr val="202B33"/>
-                </a:solidFill>
-                <a:latin typeface="Arial"/>
-                <a:ea typeface="Arial"/>
-                <a:cs typeface="Arial"/>
-              </a:rPr>
-              <a:t xml:space="preserve">Engineering —</a:t>
+              <a:t xml:space="preserve">Madeleine Clare Elish (2019), Moral Crumple</a:t>
+            </a:r>
+            <a:endParaRPr lang="en-US" sz="1500"/>
+          </a:p>
+          <a:p>
+            <a:pPr marL="0" indent="0">
+              <a:lnSpc>
+                <a:spcPts val="1950"/>
+              </a:lnSpc>
+              <a:spcAft>
+                <a:spcPts val="0"/>
+              </a:spcAft>
+              <a:buNone/>
+            </a:pPr>
+            <a:r>
+              <a:rPr lang="en-US" sz="1500" b="0">
+                <a:solidFill>
+                  <a:srgbClr val="202B33"/>
+                </a:solidFill>
+                <a:latin typeface="Arial"/>
+                <a:ea typeface="Arial"/>
+                <a:cs typeface="Arial"/>
+              </a:rPr>
+              <a:t xml:space="preserve">Zones: Cautionary Tales in Human-Robot</a:t>
+            </a:r>
+            <a:endParaRPr lang="en-US" sz="1500"/>
+          </a:p>
+          <a:p>
+            <a:pPr marL="0" indent="0">
+              <a:lnSpc>
+                <a:spcPts val="1950"/>
+              </a:lnSpc>
+              <a:spcAft>
+                <a:spcPts val="0"/>
+              </a:spcAft>
+              <a:buNone/>
+            </a:pPr>
+            <a:r>
+              <a:rPr lang="en-US" sz="1500" b="0">
+                <a:solidFill>
+                  <a:srgbClr val="202B33"/>
+                </a:solidFill>
+                <a:latin typeface="Arial"/>
+                <a:ea typeface="Arial"/>
+                <a:cs typeface="Arial"/>
+              </a:rPr>
+              <a:t xml:space="preserve">Interaction —</a:t>
+            </a:r>
+            <a:endParaRPr lang="en-US" sz="1500"/>
+          </a:p>
+          <a:p>
+            <a:pPr marL="0" indent="0">
+              <a:lnSpc>
+                <a:spcPts val="1950"/>
+              </a:lnSpc>
+              <a:spcAft>
+                <a:spcPts val="0"/>
+              </a:spcAft>
+              <a:buNone/>
+            </a:pPr>
+            <a:r>
+              <a:rPr lang="en-US" sz="1500" b="0">
+                <a:solidFill>
+                  <a:srgbClr val="202B33"/>
+                </a:solidFill>
+                <a:latin typeface="Arial"/>
+                <a:ea typeface="Arial"/>
+                <a:cs typeface="Arial"/>
+              </a:rPr>
+              <a:t xml:space="preserve">https://estsjournal.org/index.php/ests/article/download/260/177/,</a:t>
+            </a:r>
+            <a:endParaRPr lang="en-US" sz="1500"/>
+          </a:p>
+          <a:p>
+            <a:pPr marL="0" indent="0">
+              <a:lnSpc>
+                <a:spcPts val="1950"/>
+              </a:lnSpc>
+              <a:spcAft>
+                <a:spcPts val="0"/>
+              </a:spcAft>
+              <a:buNone/>
+            </a:pPr>
+            <a:r>
+              <a:rPr lang="en-US" sz="1500" b="0">
+                <a:solidFill>
+                  <a:srgbClr val="202B33"/>
+                </a:solidFill>
+                <a:latin typeface="Arial"/>
+                <a:ea typeface="Arial"/>
+                <a:cs typeface="Arial"/>
+              </a:rPr>
+              <a:t xml:space="preserve">Engaging Science, Technology, and Society</a:t>
+            </a:r>
+            <a:endParaRPr lang="en-US" sz="1500"/>
+          </a:p>
+          <a:p>
+            <a:pPr marL="0" indent="0">
+              <a:lnSpc>
+                <a:spcPts val="1950"/>
+              </a:lnSpc>
+              <a:spcAft>
+                <a:spcPts val="0"/>
+              </a:spcAft>
+              <a:buNone/>
+            </a:pPr>
+            <a:r>
+              <a:rPr lang="en-US" sz="1500" b="0">
+                <a:solidFill>
+                  <a:srgbClr val="202B33"/>
+                </a:solidFill>
+                <a:latin typeface="Arial"/>
+                <a:ea typeface="Arial"/>
+                <a:cs typeface="Arial"/>
+              </a:rPr>
+              <a:t xml:space="preserve">5, 40–60.</a:t>
+            </a:r>
+            <a:endParaRPr lang="en-US" sz="1500"/>
+          </a:p>
+          <a:p>
+            <a:pPr marL="0" indent="0">
+              <a:lnSpc>
+                <a:spcPts val="1950"/>
+              </a:lnSpc>
+              <a:spcAft>
+                <a:spcPts val="0"/>
+              </a:spcAft>
+              <a:buNone/>
+            </a:pPr>
+            <a:r>
+              <a:rPr lang="en-US" sz="1500" b="0">
+                <a:solidFill>
+                  <a:srgbClr val="202B33"/>
+                </a:solidFill>
+                <a:latin typeface="Arial"/>
+                <a:ea typeface="Arial"/>
+                <a:cs typeface="Arial"/>
+              </a:rPr>
+              <a:t xml:space="preserve"/>
             </a:r>
             <a:endParaRPr lang="en-US" sz="1500"/>
           </a:p>
@@ -13985,6 +14514,75 @@
             <a:noAutofit/>
           </a:bodyPr>
           <a:lstStyle/>
+          <a:p>
+            <a:pPr marL="0" indent="0">
+              <a:lnSpc>
+                <a:spcPts val="1950"/>
+              </a:lnSpc>
+              <a:spcAft>
+                <a:spcPts val="0"/>
+              </a:spcAft>
+              <a:buNone/>
+            </a:pPr>
+            <a:r>
+              <a:rPr lang="en-US" sz="1500" b="0">
+                <a:solidFill>
+                  <a:srgbClr val="202B33"/>
+                </a:solidFill>
+                <a:latin typeface="Arial"/>
+                <a:ea typeface="Arial"/>
+                <a:cs typeface="Arial"/>
+              </a:rPr>
+              <a:t xml:space="preserve">Frederick P. Brooks Jr., No Silver Bullet:</a:t>
+            </a:r>
+            <a:endParaRPr lang="en-US" sz="1500"/>
+          </a:p>
+          <a:p>
+            <a:pPr marL="0" indent="0">
+              <a:lnSpc>
+                <a:spcPts val="1950"/>
+              </a:lnSpc>
+              <a:spcAft>
+                <a:spcPts val="0"/>
+              </a:spcAft>
+              <a:buNone/>
+            </a:pPr>
+            <a:r>
+              <a:rPr lang="en-US" sz="1500" b="0">
+                <a:solidFill>
+                  <a:srgbClr val="202B33"/>
+                </a:solidFill>
+                <a:latin typeface="Arial"/>
+                <a:ea typeface="Arial"/>
+                <a:cs typeface="Arial"/>
+              </a:rPr>
+              <a:t xml:space="preserve">Essence and Accidents of Software</a:t>
+            </a:r>
+            <a:endParaRPr lang="en-US" sz="1500"/>
+          </a:p>
+          <a:p>
+            <a:pPr marL="0" indent="0">
+              <a:lnSpc>
+                <a:spcPts val="1950"/>
+              </a:lnSpc>
+              <a:spcAft>
+                <a:spcPts val="0"/>
+              </a:spcAft>
+              <a:buNone/>
+            </a:pPr>
+            <a:r>
+              <a:rPr lang="en-US" sz="1500" b="0">
+                <a:solidFill>
+                  <a:srgbClr val="202B33"/>
+                </a:solidFill>
+                <a:latin typeface="Arial"/>
+                <a:ea typeface="Arial"/>
+                <a:cs typeface="Arial"/>
+              </a:rPr>
+              <a:t xml:space="preserve">Engineering —</a:t>
+            </a:r>
+            <a:endParaRPr lang="en-US" sz="1500"/>
+          </a:p>
           <a:p>
             <a:pPr marL="0" indent="0">
               <a:lnSpc>
@@ -15135,7 +15733,7 @@
                 <a:ea typeface="Arial"/>
                 <a:cs typeface="Arial"/>
               </a:rPr>
-              <a:t xml:space="preserve">Where does the work actually wait?</a:t>
+              <a:t xml:space="preserve">Point at the queue</a:t>
             </a:r>
             <a:endParaRPr lang="en-US" sz="2550"/>
           </a:p>
@@ -15253,30 +15851,30 @@
                 <a:ea typeface="Arial"/>
                 <a:cs typeface="Arial"/>
               </a:rPr>
-              <a:t xml:space="preserve">Point at the queue before buying more</a:t>
-            </a:r>
-            <a:endParaRPr lang="en-US" sz="1500"/>
-          </a:p>
-          <a:p>
-            <a:pPr marL="0" indent="0">
-              <a:lnSpc>
-                <a:spcPts val="1950"/>
-              </a:lnSpc>
-              <a:spcAft>
-                <a:spcPts val="0"/>
-              </a:spcAft>
-              <a:buNone/>
-            </a:pPr>
-            <a:r>
-              <a:rPr lang="en-US" sz="1500" b="0">
-                <a:solidFill>
-                  <a:srgbClr val="202B33"/>
-                </a:solidFill>
-                <a:latin typeface="Arial"/>
-                <a:ea typeface="Arial"/>
-                <a:cs typeface="Arial"/>
-              </a:rPr>
-              <a:t xml:space="preserve">throughput</a:t>
+              <a:t xml:space="preserve">Not where it takes skill. Where it sits</a:t>
+            </a:r>
+            <a:endParaRPr lang="en-US" sz="1500"/>
+          </a:p>
+          <a:p>
+            <a:pPr marL="0" indent="0">
+              <a:lnSpc>
+                <a:spcPts val="1950"/>
+              </a:lnSpc>
+              <a:spcAft>
+                <a:spcPts val="0"/>
+              </a:spcAft>
+              <a:buNone/>
+            </a:pPr>
+            <a:r>
+              <a:rPr lang="en-US" sz="1500" b="0">
+                <a:solidFill>
+                  <a:srgbClr val="202B33"/>
+                </a:solidFill>
+                <a:latin typeface="Arial"/>
+                <a:ea typeface="Arial"/>
+                <a:cs typeface="Arial"/>
+              </a:rPr>
+              <a:t xml:space="preserve">untouched.</a:t>
             </a:r>
             <a:endParaRPr lang="en-US" sz="1500"/>
           </a:p>
@@ -15998,7 +16596,7 @@
       </p:sp>
       <p:pic>
         <p:nvPicPr>
-          <p:cNvPr id="5" name="8de9aa7b0e58010a491d155d2a0aaafbe5d48c9d4da5759fad5af686b3fce993" descr="A queue does not care how you feel about it"/>
+          <p:cNvPr id="5" name="8de9aa7b0e58010a491d155d2a0aaafbe5d48c9d4da5759fad5af686b3fce993" descr="Kingman: queue wait vs reviewer utilization, variability factor one"/>
           <p:cNvPicPr>
             <a:picLocks noChangeAspect="1"/>
           </p:cNvPicPr>
@@ -16558,30 +17156,7 @@
                 <a:ea typeface="Arial"/>
                 <a:cs typeface="Arial"/>
               </a:rPr>
-              <a:t xml:space="preserve">throughput times average time in the system. Neither</a:t>
-            </a:r>
-            <a:endParaRPr lang="en-US" sz="1200"/>
-          </a:p>
-          <a:p>
-            <a:pPr marL="0" indent="0">
-              <a:lnSpc>
-                <a:spcPts val="1575"/>
-              </a:lnSpc>
-              <a:spcAft>
-                <a:spcPts val="0"/>
-              </a:spcAft>
-              <a:buNone/>
-            </a:pPr>
-            <a:r>
-              <a:rPr lang="en-US" sz="1200" b="0">
-                <a:solidFill>
-                  <a:srgbClr val="202B33"/>
-                </a:solidFill>
-                <a:latin typeface="Arial"/>
-                <a:ea typeface="Arial"/>
-                <a:cs typeface="Arial"/>
-              </a:rPr>
-              <a:t xml:space="preserve">result says your team is literally one server. They</a:t>
+              <a:t xml:space="preserve">throughput times average time in the system. They</a:t>
             </a:r>
             <a:endParaRPr lang="en-US" sz="1200"/>
           </a:p>
@@ -16856,7 +17431,7 @@
                 <a:ea typeface="Arial"/>
                 <a:cs typeface="Arial"/>
               </a:rPr>
-              <a:t xml:space="preserve">Your ceiling is the stage you did not speed up</a:t>
+              <a:t xml:space="preserve">The stage you didn't speed up</a:t>
             </a:r>
             <a:endParaRPr lang="en-US" sz="2550"/>
           </a:p>
@@ -19799,29 +20374,6 @@
             </a:r>
             <a:endParaRPr lang="en-US" sz="1500"/>
           </a:p>
-          <a:p>
-            <a:pPr marL="0" indent="0">
-              <a:lnSpc>
-                <a:spcPts val="1950"/>
-              </a:lnSpc>
-              <a:spcAft>
-                <a:spcPts val="0"/>
-              </a:spcAft>
-              <a:buNone/>
-            </a:pPr>
-            <a:r>
-              <a:rPr lang="en-US" sz="1500" b="0">
-                <a:solidFill>
-                  <a:srgbClr val="202B33"/>
-                </a:solidFill>
-                <a:latin typeface="Arial"/>
-                <a:ea typeface="Arial"/>
-                <a:cs typeface="Arial"/>
-              </a:rPr>
-              <a:t xml:space="preserve">Those statements produce cases. An admin in</a:t>
-            </a:r>
-            <a:endParaRPr lang="en-US" sz="1500"/>
-          </a:p>
         </p:txBody>
       </p:sp>
       <p:sp>
@@ -19867,6 +20419,29 @@
                 <a:ea typeface="Arial"/>
                 <a:cs typeface="Arial"/>
               </a:rPr>
+              <a:t xml:space="preserve">Those statements produce cases. An admin in</a:t>
+            </a:r>
+            <a:endParaRPr lang="en-US" sz="1500"/>
+          </a:p>
+          <a:p>
+            <a:pPr marL="0" indent="0">
+              <a:lnSpc>
+                <a:spcPts val="1950"/>
+              </a:lnSpc>
+              <a:spcAft>
+                <a:spcPts val="0"/>
+              </a:spcAft>
+              <a:buNone/>
+            </a:pPr>
+            <a:r>
+              <a:rPr lang="en-US" sz="1500" b="0">
+                <a:solidFill>
+                  <a:srgbClr val="202B33"/>
+                </a:solidFill>
+                <a:latin typeface="Arial"/>
+                <a:ea typeface="Arial"/>
+                <a:cs typeface="Arial"/>
+              </a:rPr>
               <a:t xml:space="preserve">tenant A requests a change in A: allow. The</a:t>
             </a:r>
             <a:endParaRPr lang="en-US" sz="1500"/>
@@ -20097,76 +20672,30 @@
                 <a:ea typeface="Arial"/>
                 <a:cs typeface="Arial"/>
               </a:rPr>
-              <a:t xml:space="preserve">has to reconstruct at once. That is an</a:t>
-            </a:r>
-            <a:endParaRPr lang="en-US" sz="1500"/>
-          </a:p>
-          <a:p>
-            <a:pPr marL="0" indent="0">
-              <a:lnSpc>
-                <a:spcPts val="1950"/>
-              </a:lnSpc>
-              <a:spcAft>
-                <a:spcPts val="0"/>
-              </a:spcAft>
-              <a:buNone/>
-            </a:pPr>
-            <a:r>
-              <a:rPr lang="en-US" sz="1500" b="0">
-                <a:solidFill>
-                  <a:srgbClr val="202B33"/>
-                </a:solidFill>
-                <a:latin typeface="Arial"/>
-                <a:ea typeface="Arial"/>
-                <a:cs typeface="Arial"/>
-              </a:rPr>
-              <a:t xml:space="preserve">attempt to reduce service-time variance,</a:t>
-            </a:r>
-            <a:endParaRPr lang="en-US" sz="1500"/>
-          </a:p>
-          <a:p>
-            <a:pPr marL="0" indent="0">
-              <a:lnSpc>
-                <a:spcPts val="1950"/>
-              </a:lnSpc>
-              <a:spcAft>
-                <a:spcPts val="0"/>
-              </a:spcAft>
-              <a:buNone/>
-            </a:pPr>
-            <a:r>
-              <a:rPr lang="en-US" sz="1500" b="0">
-                <a:solidFill>
-                  <a:srgbClr val="202B33"/>
-                </a:solidFill>
-                <a:latin typeface="Arial"/>
-                <a:ea typeface="Arial"/>
-                <a:cs typeface="Arial"/>
-              </a:rPr>
-              <a:t xml:space="preserve">not a claim that a document automatically</a:t>
-            </a:r>
-            <a:endParaRPr lang="en-US" sz="1500"/>
-          </a:p>
-          <a:p>
-            <a:pPr marL="0" indent="0">
-              <a:lnSpc>
-                <a:spcPts val="1950"/>
-              </a:lnSpc>
-              <a:spcAft>
-                <a:spcPts val="0"/>
-              </a:spcAft>
-              <a:buNone/>
-            </a:pPr>
-            <a:r>
-              <a:rPr lang="en-US" sz="1500" b="0">
-                <a:solidFill>
-                  <a:srgbClr val="202B33"/>
-                </a:solidFill>
-                <a:latin typeface="Arial"/>
-                <a:ea typeface="Arial"/>
-                <a:cs typeface="Arial"/>
-              </a:rPr>
-              <a:t xml:space="preserve">changes a coefficient.</a:t>
+              <a:t xml:space="preserve">has to reconstruct at once. That is the</a:t>
+            </a:r>
+            <a:endParaRPr lang="en-US" sz="1500"/>
+          </a:p>
+          <a:p>
+            <a:pPr marL="0" indent="0">
+              <a:lnSpc>
+                <a:spcPts val="1950"/>
+              </a:lnSpc>
+              <a:spcAft>
+                <a:spcPts val="0"/>
+              </a:spcAft>
+              <a:buNone/>
+            </a:pPr>
+            <a:r>
+              <a:rPr lang="en-US" sz="1500" b="0">
+                <a:solidFill>
+                  <a:srgbClr val="202B33"/>
+                </a:solidFill>
+                <a:latin typeface="Arial"/>
+                <a:ea typeface="Arial"/>
+                <a:cs typeface="Arial"/>
+              </a:rPr>
+              <a:t xml:space="preserve">variance term. On purpose.</a:t>
             </a:r>
             <a:endParaRPr lang="en-US" sz="1500"/>
           </a:p>
